--- a/lectures/lec9_sched.pptx
+++ b/lectures/lec9_sched.pptx
@@ -290,7 +290,7 @@
           <a:p>
             <a:fld id="{050F0499-AE52-4672-879B-3107B2FC2A9F}" type="datetimeFigureOut">
               <a:rPr lang="ko-KR" altLang="en-US" smtClean="0"/>
-              <a:t>2024. 10. 13.</a:t>
+              <a:t>2026. 2. 11.</a:t>
             </a:fld>
             <a:endParaRPr lang="ko-KR" altLang="en-US"/>
           </a:p>
@@ -37537,6 +37537,51 @@
           </a:extLst>
         </p:spPr>
       </p:pic>
+      <p:sp>
+        <p:nvSpPr>
+          <p:cNvPr id="7" name="TextBox 6">
+            <a:extLst>
+              <a:ext uri="{FF2B5EF4-FFF2-40B4-BE49-F238E27FC236}">
+                <a16:creationId xmlns:a16="http://schemas.microsoft.com/office/drawing/2014/main" id="{09C03C02-150C-4145-4BEC-A97BEE653748}"/>
+              </a:ext>
+            </a:extLst>
+          </p:cNvPr>
+          <p:cNvSpPr txBox="1"/>
+          <p:nvPr/>
+        </p:nvSpPr>
+        <p:spPr>
+          <a:xfrm>
+            <a:off x="4788024" y="764704"/>
+            <a:ext cx="4612192" cy="307777"/>
+          </a:xfrm>
+          <a:prstGeom prst="rect">
+            <a:avLst/>
+          </a:prstGeom>
+          <a:noFill/>
+        </p:spPr>
+        <p:txBody>
+          <a:bodyPr wrap="square">
+            <a:spAutoFit/>
+          </a:bodyPr>
+          <a:lstStyle/>
+          <a:p>
+            <a:r>
+              <a:rPr lang="en-US" sz="1400" dirty="0">
+                <a:latin typeface="Malgun Gothic Semilight" panose="020B0502040204020203" pitchFamily="34" charset="-128"/>
+                <a:ea typeface="Malgun Gothic Semilight" panose="020B0502040204020203" pitchFamily="34" charset="-128"/>
+                <a:cs typeface="Malgun Gothic Semilight" panose="020B0502040204020203" pitchFamily="34" charset="-128"/>
+                <a:hlinkClick r:id="rId3"/>
+              </a:rPr>
+              <a:t>https://pages.cs.wisc.edu/~eli/537/lectures/Solaris.pdf</a:t>
+            </a:r>
+            <a:endParaRPr lang="en-US" sz="1400" dirty="0">
+              <a:latin typeface="Malgun Gothic Semilight" panose="020B0502040204020203" pitchFamily="34" charset="-128"/>
+              <a:ea typeface="Malgun Gothic Semilight" panose="020B0502040204020203" pitchFamily="34" charset="-128"/>
+              <a:cs typeface="Malgun Gothic Semilight" panose="020B0502040204020203" pitchFamily="34" charset="-128"/>
+            </a:endParaRPr>
+          </a:p>
+        </p:txBody>
+      </p:sp>
     </p:spTree>
     <p:extLst>
       <p:ext uri="{BB962C8B-B14F-4D97-AF65-F5344CB8AC3E}">
@@ -42343,14 +42388,14 @@
           <a:effectLst/>
           <a:extLst>
             <a:ext uri="{909E8E84-426E-40dd-AFC4-6F175D3DCCD1}">
-              <a14:hiddenFill xmlns="" xmlns:a14="http://schemas.microsoft.com/office/drawing/2010/main">
+              <a14:hiddenFill xmlns:a14="http://schemas.microsoft.com/office/drawing/2010/main" xmlns="">
                 <a:solidFill>
                   <a:schemeClr val="accent1"/>
                 </a:solidFill>
               </a14:hiddenFill>
             </a:ext>
             <a:ext uri="{91240B29-F687-4f45-9708-019B960494DF}">
-              <a14:hiddenLine xmlns="" xmlns:a14="http://schemas.microsoft.com/office/drawing/2010/main" w="9525">
+              <a14:hiddenLine xmlns:a14="http://schemas.microsoft.com/office/drawing/2010/main" xmlns="" w="9525">
                 <a:solidFill>
                   <a:schemeClr val="tx1"/>
                 </a:solidFill>
@@ -42360,7 +42405,7 @@
               </a14:hiddenLine>
             </a:ext>
             <a:ext uri="{AF507438-7753-43e0-B8FC-AC1667EBCBE1}">
-              <a14:hiddenEffects xmlns="" xmlns:a14="http://schemas.microsoft.com/office/drawing/2010/main">
+              <a14:hiddenEffects xmlns:a14="http://schemas.microsoft.com/office/drawing/2010/main" xmlns="">
                 <a:effectLst>
                   <a:outerShdw dist="35921" dir="2700000" algn="ctr" rotWithShape="0">
                     <a:schemeClr val="bg2"/>

--- a/lectures/lec9_sched.pptx
+++ b/lectures/lec9_sched.pptx
@@ -290,7 +290,7 @@
           <a:p>
             <a:fld id="{050F0499-AE52-4672-879B-3107B2FC2A9F}" type="datetimeFigureOut">
               <a:rPr lang="ko-KR" altLang="en-US" smtClean="0"/>
-              <a:t>2026. 2. 11.</a:t>
+              <a:t>2026. 2. 12.</a:t>
             </a:fld>
             <a:endParaRPr lang="ko-KR" altLang="en-US"/>
           </a:p>
@@ -30848,4960 +30848,6 @@
           </a:p>
         </p:txBody>
       </p:sp>
-      <p:grpSp>
-        <p:nvGrpSpPr>
-          <p:cNvPr id="6" name="그룹 5"/>
-          <p:cNvGrpSpPr/>
-          <p:nvPr/>
-        </p:nvGrpSpPr>
-        <p:grpSpPr>
-          <a:xfrm>
-            <a:off x="-36512" y="3565167"/>
-            <a:ext cx="4448447" cy="2456121"/>
-            <a:chOff x="-36512" y="2204864"/>
-            <a:chExt cx="4448447" cy="2456121"/>
-          </a:xfrm>
-        </p:grpSpPr>
-        <p:cxnSp>
-          <p:nvCxnSpPr>
-            <p:cNvPr id="7" name="직선 연결선 6"/>
-            <p:cNvCxnSpPr/>
-            <p:nvPr/>
-          </p:nvCxnSpPr>
-          <p:spPr>
-            <a:xfrm>
-              <a:off x="601131" y="3660456"/>
-              <a:ext cx="3600000" cy="0"/>
-            </a:xfrm>
-            <a:prstGeom prst="line">
-              <a:avLst/>
-            </a:prstGeom>
-            <a:ln w="19050">
-              <a:solidFill>
-                <a:schemeClr val="tx1"/>
-              </a:solidFill>
-              <a:prstDash val="sysDot"/>
-              <a:tailEnd type="none"/>
-            </a:ln>
-          </p:spPr>
-          <p:style>
-            <a:lnRef idx="1">
-              <a:schemeClr val="accent1"/>
-            </a:lnRef>
-            <a:fillRef idx="0">
-              <a:schemeClr val="accent1"/>
-            </a:fillRef>
-            <a:effectRef idx="0">
-              <a:schemeClr val="accent1"/>
-            </a:effectRef>
-            <a:fontRef idx="minor">
-              <a:schemeClr val="tx1"/>
-            </a:fontRef>
-          </p:style>
-        </p:cxnSp>
-        <p:cxnSp>
-          <p:nvCxnSpPr>
-            <p:cNvPr id="8" name="직선 연결선 7"/>
-            <p:cNvCxnSpPr/>
-            <p:nvPr/>
-          </p:nvCxnSpPr>
-          <p:spPr>
-            <a:xfrm>
-              <a:off x="595511" y="4379767"/>
-              <a:ext cx="3600000" cy="0"/>
-            </a:xfrm>
-            <a:prstGeom prst="line">
-              <a:avLst/>
-            </a:prstGeom>
-            <a:ln w="19050">
-              <a:solidFill>
-                <a:schemeClr val="tx1"/>
-              </a:solidFill>
-              <a:prstDash val="sysDot"/>
-              <a:tailEnd type="none"/>
-            </a:ln>
-          </p:spPr>
-          <p:style>
-            <a:lnRef idx="1">
-              <a:schemeClr val="accent1"/>
-            </a:lnRef>
-            <a:fillRef idx="0">
-              <a:schemeClr val="accent1"/>
-            </a:fillRef>
-            <a:effectRef idx="0">
-              <a:schemeClr val="accent1"/>
-            </a:effectRef>
-            <a:fontRef idx="minor">
-              <a:schemeClr val="tx1"/>
-            </a:fontRef>
-          </p:style>
-        </p:cxnSp>
-        <p:sp>
-          <p:nvSpPr>
-            <p:cNvPr id="9" name="직사각형 8"/>
-            <p:cNvSpPr/>
-            <p:nvPr/>
-          </p:nvSpPr>
-          <p:spPr>
-            <a:xfrm>
-              <a:off x="588592" y="4004768"/>
-              <a:ext cx="54000" cy="360000"/>
-            </a:xfrm>
-            <a:prstGeom prst="rect">
-              <a:avLst/>
-            </a:prstGeom>
-            <a:solidFill>
-              <a:schemeClr val="tx1"/>
-            </a:solidFill>
-            <a:ln w="9525">
-              <a:solidFill>
-                <a:schemeClr val="tx1"/>
-              </a:solidFill>
-            </a:ln>
-            <a:effectLst/>
-          </p:spPr>
-          <p:style>
-            <a:lnRef idx="3">
-              <a:schemeClr val="lt1"/>
-            </a:lnRef>
-            <a:fillRef idx="1">
-              <a:schemeClr val="accent1"/>
-            </a:fillRef>
-            <a:effectRef idx="1">
-              <a:schemeClr val="accent1"/>
-            </a:effectRef>
-            <a:fontRef idx="minor">
-              <a:schemeClr val="lt1"/>
-            </a:fontRef>
-          </p:style>
-          <p:txBody>
-            <a:bodyPr lIns="252000" rtlCol="0" anchor="ctr"/>
-            <a:lstStyle/>
-            <a:p>
-              <a:pPr algn="ctr"/>
-              <a:endParaRPr lang="ko-KR" altLang="en-US" sz="1600" dirty="0">
-                <a:solidFill>
-                  <a:srgbClr val="00B050"/>
-                </a:solidFill>
-                <a:latin typeface="Courier New" pitchFamily="49" charset="0"/>
-                <a:ea typeface="맑은 고딕" pitchFamily="50" charset="-127"/>
-                <a:cs typeface="Courier New" pitchFamily="49" charset="0"/>
-              </a:endParaRPr>
-            </a:p>
-          </p:txBody>
-        </p:sp>
-        <p:sp>
-          <p:nvSpPr>
-            <p:cNvPr id="10" name="TextBox 9"/>
-            <p:cNvSpPr txBox="1"/>
-            <p:nvPr/>
-          </p:nvSpPr>
-          <p:spPr>
-            <a:xfrm>
-              <a:off x="480070" y="4380538"/>
-              <a:ext cx="216024" cy="276999"/>
-            </a:xfrm>
-            <a:prstGeom prst="rect">
-              <a:avLst/>
-            </a:prstGeom>
-            <a:noFill/>
-          </p:spPr>
-          <p:txBody>
-            <a:bodyPr wrap="square" rtlCol="0">
-              <a:spAutoFit/>
-            </a:bodyPr>
-            <a:lstStyle/>
-            <a:p>
-              <a:pPr algn="ctr"/>
-              <a:r>
-                <a:rPr lang="en-US" altLang="ko-KR" sz="1200" b="1" dirty="0">
-                  <a:solidFill>
-                    <a:prstClr val="black"/>
-                  </a:solidFill>
-                  <a:latin typeface="맑은 고딕" pitchFamily="50" charset="-127"/>
-                  <a:ea typeface="맑은 고딕" pitchFamily="50" charset="-127"/>
-                </a:rPr>
-                <a:t>0</a:t>
-              </a:r>
-              <a:endParaRPr lang="ko-KR" altLang="en-US" sz="1200" b="1" dirty="0">
-                <a:solidFill>
-                  <a:prstClr val="black"/>
-                </a:solidFill>
-                <a:latin typeface="맑은 고딕" pitchFamily="50" charset="-127"/>
-                <a:ea typeface="맑은 고딕" pitchFamily="50" charset="-127"/>
-              </a:endParaRPr>
-            </a:p>
-          </p:txBody>
-        </p:sp>
-        <p:sp>
-          <p:nvSpPr>
-            <p:cNvPr id="11" name="TextBox 10"/>
-            <p:cNvSpPr txBox="1"/>
-            <p:nvPr/>
-          </p:nvSpPr>
-          <p:spPr>
-            <a:xfrm>
-              <a:off x="1260180" y="4380537"/>
-              <a:ext cx="432048" cy="276999"/>
-            </a:xfrm>
-            <a:prstGeom prst="rect">
-              <a:avLst/>
-            </a:prstGeom>
-            <a:noFill/>
-          </p:spPr>
-          <p:txBody>
-            <a:bodyPr wrap="square" rtlCol="0">
-              <a:spAutoFit/>
-            </a:bodyPr>
-            <a:lstStyle/>
-            <a:p>
-              <a:pPr algn="ctr"/>
-              <a:r>
-                <a:rPr lang="en-US" altLang="ko-KR" sz="1200" b="1" dirty="0">
-                  <a:solidFill>
-                    <a:prstClr val="black"/>
-                  </a:solidFill>
-                  <a:latin typeface="맑은 고딕" pitchFamily="50" charset="-127"/>
-                  <a:ea typeface="맑은 고딕" pitchFamily="50" charset="-127"/>
-                </a:rPr>
-                <a:t>50</a:t>
-              </a:r>
-              <a:endParaRPr lang="ko-KR" altLang="en-US" sz="1200" b="1" dirty="0">
-                <a:solidFill>
-                  <a:prstClr val="black"/>
-                </a:solidFill>
-                <a:latin typeface="맑은 고딕" pitchFamily="50" charset="-127"/>
-                <a:ea typeface="맑은 고딕" pitchFamily="50" charset="-127"/>
-              </a:endParaRPr>
-            </a:p>
-          </p:txBody>
-        </p:sp>
-        <p:sp>
-          <p:nvSpPr>
-            <p:cNvPr id="12" name="TextBox 11"/>
-            <p:cNvSpPr txBox="1"/>
-            <p:nvPr/>
-          </p:nvSpPr>
-          <p:spPr>
-            <a:xfrm>
-              <a:off x="2046053" y="4380536"/>
-              <a:ext cx="555300" cy="276999"/>
-            </a:xfrm>
-            <a:prstGeom prst="rect">
-              <a:avLst/>
-            </a:prstGeom>
-            <a:noFill/>
-          </p:spPr>
-          <p:txBody>
-            <a:bodyPr wrap="square" rtlCol="0">
-              <a:spAutoFit/>
-            </a:bodyPr>
-            <a:lstStyle/>
-            <a:p>
-              <a:pPr algn="ctr"/>
-              <a:r>
-                <a:rPr lang="en-US" altLang="ko-KR" sz="1200" b="1" dirty="0">
-                  <a:solidFill>
-                    <a:prstClr val="black"/>
-                  </a:solidFill>
-                  <a:latin typeface="맑은 고딕" pitchFamily="50" charset="-127"/>
-                  <a:ea typeface="맑은 고딕" pitchFamily="50" charset="-127"/>
-                </a:rPr>
-                <a:t>100</a:t>
-              </a:r>
-              <a:endParaRPr lang="ko-KR" altLang="en-US" sz="1200" b="1" dirty="0">
-                <a:solidFill>
-                  <a:prstClr val="black"/>
-                </a:solidFill>
-                <a:latin typeface="맑은 고딕" pitchFamily="50" charset="-127"/>
-                <a:ea typeface="맑은 고딕" pitchFamily="50" charset="-127"/>
-              </a:endParaRPr>
-            </a:p>
-          </p:txBody>
-        </p:sp>
-        <p:sp>
-          <p:nvSpPr>
-            <p:cNvPr id="13" name="TextBox 12"/>
-            <p:cNvSpPr txBox="1"/>
-            <p:nvPr/>
-          </p:nvSpPr>
-          <p:spPr>
-            <a:xfrm>
-              <a:off x="2953582" y="4383986"/>
-              <a:ext cx="555300" cy="276999"/>
-            </a:xfrm>
-            <a:prstGeom prst="rect">
-              <a:avLst/>
-            </a:prstGeom>
-            <a:noFill/>
-          </p:spPr>
-          <p:txBody>
-            <a:bodyPr wrap="square" rtlCol="0">
-              <a:spAutoFit/>
-            </a:bodyPr>
-            <a:lstStyle/>
-            <a:p>
-              <a:pPr algn="ctr"/>
-              <a:r>
-                <a:rPr lang="en-US" altLang="ko-KR" sz="1200" b="1" dirty="0">
-                  <a:solidFill>
-                    <a:prstClr val="black"/>
-                  </a:solidFill>
-                  <a:latin typeface="맑은 고딕" pitchFamily="50" charset="-127"/>
-                  <a:ea typeface="맑은 고딕" pitchFamily="50" charset="-127"/>
-                </a:rPr>
-                <a:t>150</a:t>
-              </a:r>
-              <a:endParaRPr lang="ko-KR" altLang="en-US" sz="1200" b="1" dirty="0">
-                <a:solidFill>
-                  <a:prstClr val="black"/>
-                </a:solidFill>
-                <a:latin typeface="맑은 고딕" pitchFamily="50" charset="-127"/>
-                <a:ea typeface="맑은 고딕" pitchFamily="50" charset="-127"/>
-              </a:endParaRPr>
-            </a:p>
-          </p:txBody>
-        </p:sp>
-        <p:sp>
-          <p:nvSpPr>
-            <p:cNvPr id="14" name="TextBox 13"/>
-            <p:cNvSpPr txBox="1"/>
-            <p:nvPr/>
-          </p:nvSpPr>
-          <p:spPr>
-            <a:xfrm>
-              <a:off x="3856635" y="4383986"/>
-              <a:ext cx="555300" cy="276999"/>
-            </a:xfrm>
-            <a:prstGeom prst="rect">
-              <a:avLst/>
-            </a:prstGeom>
-            <a:noFill/>
-          </p:spPr>
-          <p:txBody>
-            <a:bodyPr wrap="square" rtlCol="0">
-              <a:spAutoFit/>
-            </a:bodyPr>
-            <a:lstStyle/>
-            <a:p>
-              <a:pPr algn="ctr"/>
-              <a:r>
-                <a:rPr lang="en-US" altLang="ko-KR" sz="1200" b="1" dirty="0">
-                  <a:solidFill>
-                    <a:prstClr val="black"/>
-                  </a:solidFill>
-                  <a:latin typeface="맑은 고딕" pitchFamily="50" charset="-127"/>
-                  <a:ea typeface="맑은 고딕" pitchFamily="50" charset="-127"/>
-                </a:rPr>
-                <a:t>200</a:t>
-              </a:r>
-              <a:endParaRPr lang="ko-KR" altLang="en-US" sz="1200" b="1" dirty="0">
-                <a:solidFill>
-                  <a:prstClr val="black"/>
-                </a:solidFill>
-                <a:latin typeface="맑은 고딕" pitchFamily="50" charset="-127"/>
-                <a:ea typeface="맑은 고딕" pitchFamily="50" charset="-127"/>
-              </a:endParaRPr>
-            </a:p>
-          </p:txBody>
-        </p:sp>
-        <p:sp>
-          <p:nvSpPr>
-            <p:cNvPr id="15" name="TextBox 14"/>
-            <p:cNvSpPr txBox="1"/>
-            <p:nvPr/>
-          </p:nvSpPr>
-          <p:spPr>
-            <a:xfrm>
-              <a:off x="-36512" y="2392887"/>
-              <a:ext cx="632023" cy="369332"/>
-            </a:xfrm>
-            <a:prstGeom prst="rect">
-              <a:avLst/>
-            </a:prstGeom>
-            <a:noFill/>
-          </p:spPr>
-          <p:txBody>
-            <a:bodyPr wrap="square" rtlCol="0">
-              <a:spAutoFit/>
-            </a:bodyPr>
-            <a:lstStyle/>
-            <a:p>
-              <a:pPr algn="r"/>
-              <a:r>
-                <a:rPr lang="en-US" altLang="ko-KR" dirty="0">
-                  <a:solidFill>
-                    <a:prstClr val="black"/>
-                  </a:solidFill>
-                  <a:latin typeface="맑은 고딕" pitchFamily="50" charset="-127"/>
-                  <a:ea typeface="맑은 고딕" pitchFamily="50" charset="-127"/>
-                </a:rPr>
-                <a:t>Q2</a:t>
-              </a:r>
-              <a:endParaRPr lang="ko-KR" altLang="en-US" dirty="0">
-                <a:solidFill>
-                  <a:prstClr val="black"/>
-                </a:solidFill>
-                <a:latin typeface="맑은 고딕" pitchFamily="50" charset="-127"/>
-                <a:ea typeface="맑은 고딕" pitchFamily="50" charset="-127"/>
-              </a:endParaRPr>
-            </a:p>
-          </p:txBody>
-        </p:sp>
-        <p:sp>
-          <p:nvSpPr>
-            <p:cNvPr id="16" name="TextBox 15"/>
-            <p:cNvSpPr txBox="1"/>
-            <p:nvPr/>
-          </p:nvSpPr>
-          <p:spPr>
-            <a:xfrm>
-              <a:off x="-36512" y="3084392"/>
-              <a:ext cx="632023" cy="369332"/>
-            </a:xfrm>
-            <a:prstGeom prst="rect">
-              <a:avLst/>
-            </a:prstGeom>
-            <a:noFill/>
-          </p:spPr>
-          <p:txBody>
-            <a:bodyPr wrap="square" rtlCol="0">
-              <a:spAutoFit/>
-            </a:bodyPr>
-            <a:lstStyle/>
-            <a:p>
-              <a:pPr algn="r"/>
-              <a:r>
-                <a:rPr lang="en-US" altLang="ko-KR" dirty="0">
-                  <a:solidFill>
-                    <a:prstClr val="black"/>
-                  </a:solidFill>
-                  <a:latin typeface="맑은 고딕" pitchFamily="50" charset="-127"/>
-                  <a:ea typeface="맑은 고딕" pitchFamily="50" charset="-127"/>
-                </a:rPr>
-                <a:t>Q1</a:t>
-              </a:r>
-              <a:endParaRPr lang="ko-KR" altLang="en-US" dirty="0">
-                <a:solidFill>
-                  <a:prstClr val="black"/>
-                </a:solidFill>
-                <a:latin typeface="맑은 고딕" pitchFamily="50" charset="-127"/>
-                <a:ea typeface="맑은 고딕" pitchFamily="50" charset="-127"/>
-              </a:endParaRPr>
-            </a:p>
-          </p:txBody>
-        </p:sp>
-        <p:sp>
-          <p:nvSpPr>
-            <p:cNvPr id="17" name="TextBox 16"/>
-            <p:cNvSpPr txBox="1"/>
-            <p:nvPr/>
-          </p:nvSpPr>
-          <p:spPr>
-            <a:xfrm>
-              <a:off x="-36512" y="3804472"/>
-              <a:ext cx="632023" cy="369332"/>
-            </a:xfrm>
-            <a:prstGeom prst="rect">
-              <a:avLst/>
-            </a:prstGeom>
-            <a:noFill/>
-          </p:spPr>
-          <p:txBody>
-            <a:bodyPr wrap="square" rtlCol="0">
-              <a:spAutoFit/>
-            </a:bodyPr>
-            <a:lstStyle/>
-            <a:p>
-              <a:pPr algn="r"/>
-              <a:r>
-                <a:rPr lang="en-US" altLang="ko-KR" dirty="0">
-                  <a:solidFill>
-                    <a:prstClr val="black"/>
-                  </a:solidFill>
-                  <a:latin typeface="맑은 고딕" pitchFamily="50" charset="-127"/>
-                  <a:ea typeface="맑은 고딕" pitchFamily="50" charset="-127"/>
-                </a:rPr>
-                <a:t>Q0</a:t>
-              </a:r>
-              <a:endParaRPr lang="ko-KR" altLang="en-US" dirty="0">
-                <a:solidFill>
-                  <a:prstClr val="black"/>
-                </a:solidFill>
-                <a:latin typeface="맑은 고딕" pitchFamily="50" charset="-127"/>
-                <a:ea typeface="맑은 고딕" pitchFamily="50" charset="-127"/>
-              </a:endParaRPr>
-            </a:p>
-          </p:txBody>
-        </p:sp>
-        <p:cxnSp>
-          <p:nvCxnSpPr>
-            <p:cNvPr id="18" name="직선 연결선 17"/>
-            <p:cNvCxnSpPr/>
-            <p:nvPr/>
-          </p:nvCxnSpPr>
-          <p:spPr>
-            <a:xfrm>
-              <a:off x="615592" y="2940456"/>
-              <a:ext cx="3600000" cy="0"/>
-            </a:xfrm>
-            <a:prstGeom prst="line">
-              <a:avLst/>
-            </a:prstGeom>
-            <a:ln w="19050">
-              <a:solidFill>
-                <a:schemeClr val="tx1"/>
-              </a:solidFill>
-              <a:prstDash val="sysDot"/>
-              <a:tailEnd type="none"/>
-            </a:ln>
-          </p:spPr>
-          <p:style>
-            <a:lnRef idx="1">
-              <a:schemeClr val="accent1"/>
-            </a:lnRef>
-            <a:fillRef idx="0">
-              <a:schemeClr val="accent1"/>
-            </a:fillRef>
-            <a:effectRef idx="0">
-              <a:schemeClr val="accent1"/>
-            </a:effectRef>
-            <a:fontRef idx="minor">
-              <a:schemeClr val="tx1"/>
-            </a:fontRef>
-          </p:style>
-        </p:cxnSp>
-        <p:sp>
-          <p:nvSpPr>
-            <p:cNvPr id="19" name="직사각형 18"/>
-            <p:cNvSpPr/>
-            <p:nvPr/>
-          </p:nvSpPr>
-          <p:spPr>
-            <a:xfrm>
-              <a:off x="648485" y="2204904"/>
-              <a:ext cx="144000" cy="360000"/>
-            </a:xfrm>
-            <a:prstGeom prst="rect">
-              <a:avLst/>
-            </a:prstGeom>
-            <a:pattFill prst="wdDnDiag">
-              <a:fgClr>
-                <a:schemeClr val="tx1"/>
-              </a:fgClr>
-              <a:bgClr>
-                <a:schemeClr val="bg1"/>
-              </a:bgClr>
-            </a:pattFill>
-            <a:ln w="9525">
-              <a:solidFill>
-                <a:schemeClr val="tx1"/>
-              </a:solidFill>
-            </a:ln>
-            <a:effectLst/>
-          </p:spPr>
-          <p:style>
-            <a:lnRef idx="3">
-              <a:schemeClr val="lt1"/>
-            </a:lnRef>
-            <a:fillRef idx="1">
-              <a:schemeClr val="accent1"/>
-            </a:fillRef>
-            <a:effectRef idx="1">
-              <a:schemeClr val="accent1"/>
-            </a:effectRef>
-            <a:fontRef idx="minor">
-              <a:schemeClr val="lt1"/>
-            </a:fontRef>
-          </p:style>
-          <p:txBody>
-            <a:bodyPr lIns="252000" rtlCol="0" anchor="ctr"/>
-            <a:lstStyle/>
-            <a:p>
-              <a:pPr algn="ctr"/>
-              <a:endParaRPr lang="ko-KR" altLang="en-US" sz="1600" dirty="0">
-                <a:solidFill>
-                  <a:srgbClr val="00B050"/>
-                </a:solidFill>
-                <a:latin typeface="Courier New" pitchFamily="49" charset="0"/>
-                <a:ea typeface="맑은 고딕" pitchFamily="50" charset="-127"/>
-                <a:cs typeface="Courier New" pitchFamily="49" charset="0"/>
-              </a:endParaRPr>
-            </a:p>
-          </p:txBody>
-        </p:sp>
-        <p:sp>
-          <p:nvSpPr>
-            <p:cNvPr id="20" name="직사각형 19"/>
-            <p:cNvSpPr/>
-            <p:nvPr/>
-          </p:nvSpPr>
-          <p:spPr>
-            <a:xfrm>
-              <a:off x="792485" y="4004728"/>
-              <a:ext cx="54000" cy="360000"/>
-            </a:xfrm>
-            <a:prstGeom prst="rect">
-              <a:avLst/>
-            </a:prstGeom>
-            <a:solidFill>
-              <a:schemeClr val="tx1"/>
-            </a:solidFill>
-            <a:ln w="9525">
-              <a:solidFill>
-                <a:schemeClr val="tx1"/>
-              </a:solidFill>
-            </a:ln>
-            <a:effectLst/>
-          </p:spPr>
-          <p:style>
-            <a:lnRef idx="3">
-              <a:schemeClr val="lt1"/>
-            </a:lnRef>
-            <a:fillRef idx="1">
-              <a:schemeClr val="accent1"/>
-            </a:fillRef>
-            <a:effectRef idx="1">
-              <a:schemeClr val="accent1"/>
-            </a:effectRef>
-            <a:fontRef idx="minor">
-              <a:schemeClr val="lt1"/>
-            </a:fontRef>
-          </p:style>
-          <p:txBody>
-            <a:bodyPr lIns="252000" rtlCol="0" anchor="ctr"/>
-            <a:lstStyle/>
-            <a:p>
-              <a:pPr algn="ctr"/>
-              <a:endParaRPr lang="ko-KR" altLang="en-US" sz="1600" dirty="0">
-                <a:solidFill>
-                  <a:srgbClr val="00B050"/>
-                </a:solidFill>
-                <a:latin typeface="Courier New" pitchFamily="49" charset="0"/>
-                <a:ea typeface="맑은 고딕" pitchFamily="50" charset="-127"/>
-                <a:cs typeface="Courier New" pitchFamily="49" charset="0"/>
-              </a:endParaRPr>
-            </a:p>
-          </p:txBody>
-        </p:sp>
-        <p:sp>
-          <p:nvSpPr>
-            <p:cNvPr id="21" name="직사각형 20"/>
-            <p:cNvSpPr/>
-            <p:nvPr/>
-          </p:nvSpPr>
-          <p:spPr>
-            <a:xfrm>
-              <a:off x="852378" y="2204864"/>
-              <a:ext cx="144000" cy="360000"/>
-            </a:xfrm>
-            <a:prstGeom prst="rect">
-              <a:avLst/>
-            </a:prstGeom>
-            <a:pattFill prst="wdDnDiag">
-              <a:fgClr>
-                <a:schemeClr val="tx1"/>
-              </a:fgClr>
-              <a:bgClr>
-                <a:schemeClr val="bg1"/>
-              </a:bgClr>
-            </a:pattFill>
-            <a:ln w="9525">
-              <a:solidFill>
-                <a:schemeClr val="tx1"/>
-              </a:solidFill>
-            </a:ln>
-            <a:effectLst/>
-          </p:spPr>
-          <p:style>
-            <a:lnRef idx="3">
-              <a:schemeClr val="lt1"/>
-            </a:lnRef>
-            <a:fillRef idx="1">
-              <a:schemeClr val="accent1"/>
-            </a:fillRef>
-            <a:effectRef idx="1">
-              <a:schemeClr val="accent1"/>
-            </a:effectRef>
-            <a:fontRef idx="minor">
-              <a:schemeClr val="lt1"/>
-            </a:fontRef>
-          </p:style>
-          <p:txBody>
-            <a:bodyPr lIns="252000" rtlCol="0" anchor="ctr"/>
-            <a:lstStyle/>
-            <a:p>
-              <a:pPr algn="ctr"/>
-              <a:endParaRPr lang="ko-KR" altLang="en-US" sz="1600" dirty="0">
-                <a:solidFill>
-                  <a:srgbClr val="00B050"/>
-                </a:solidFill>
-                <a:latin typeface="Courier New" pitchFamily="49" charset="0"/>
-                <a:ea typeface="맑은 고딕" pitchFamily="50" charset="-127"/>
-                <a:cs typeface="Courier New" pitchFamily="49" charset="0"/>
-              </a:endParaRPr>
-            </a:p>
-          </p:txBody>
-        </p:sp>
-        <p:sp>
-          <p:nvSpPr>
-            <p:cNvPr id="22" name="직사각형 21"/>
-            <p:cNvSpPr/>
-            <p:nvPr/>
-          </p:nvSpPr>
-          <p:spPr>
-            <a:xfrm>
-              <a:off x="979813" y="4004768"/>
-              <a:ext cx="54000" cy="360000"/>
-            </a:xfrm>
-            <a:prstGeom prst="rect">
-              <a:avLst/>
-            </a:prstGeom>
-            <a:solidFill>
-              <a:schemeClr val="tx1"/>
-            </a:solidFill>
-            <a:ln w="9525">
-              <a:solidFill>
-                <a:schemeClr val="tx1"/>
-              </a:solidFill>
-            </a:ln>
-            <a:effectLst/>
-          </p:spPr>
-          <p:style>
-            <a:lnRef idx="3">
-              <a:schemeClr val="lt1"/>
-            </a:lnRef>
-            <a:fillRef idx="1">
-              <a:schemeClr val="accent1"/>
-            </a:fillRef>
-            <a:effectRef idx="1">
-              <a:schemeClr val="accent1"/>
-            </a:effectRef>
-            <a:fontRef idx="minor">
-              <a:schemeClr val="lt1"/>
-            </a:fontRef>
-          </p:style>
-          <p:txBody>
-            <a:bodyPr lIns="252000" rtlCol="0" anchor="ctr"/>
-            <a:lstStyle/>
-            <a:p>
-              <a:pPr algn="ctr"/>
-              <a:endParaRPr lang="ko-KR" altLang="en-US" sz="1600" dirty="0">
-                <a:solidFill>
-                  <a:srgbClr val="00B050"/>
-                </a:solidFill>
-                <a:latin typeface="Courier New" pitchFamily="49" charset="0"/>
-                <a:ea typeface="맑은 고딕" pitchFamily="50" charset="-127"/>
-                <a:cs typeface="Courier New" pitchFamily="49" charset="0"/>
-              </a:endParaRPr>
-            </a:p>
-          </p:txBody>
-        </p:sp>
-        <p:sp>
-          <p:nvSpPr>
-            <p:cNvPr id="23" name="직사각형 22"/>
-            <p:cNvSpPr/>
-            <p:nvPr/>
-          </p:nvSpPr>
-          <p:spPr>
-            <a:xfrm>
-              <a:off x="1039706" y="2204904"/>
-              <a:ext cx="144000" cy="360000"/>
-            </a:xfrm>
-            <a:prstGeom prst="rect">
-              <a:avLst/>
-            </a:prstGeom>
-            <a:pattFill prst="wdDnDiag">
-              <a:fgClr>
-                <a:schemeClr val="tx1"/>
-              </a:fgClr>
-              <a:bgClr>
-                <a:schemeClr val="bg1"/>
-              </a:bgClr>
-            </a:pattFill>
-            <a:ln w="9525">
-              <a:solidFill>
-                <a:schemeClr val="tx1"/>
-              </a:solidFill>
-            </a:ln>
-            <a:effectLst/>
-          </p:spPr>
-          <p:style>
-            <a:lnRef idx="3">
-              <a:schemeClr val="lt1"/>
-            </a:lnRef>
-            <a:fillRef idx="1">
-              <a:schemeClr val="accent1"/>
-            </a:fillRef>
-            <a:effectRef idx="1">
-              <a:schemeClr val="accent1"/>
-            </a:effectRef>
-            <a:fontRef idx="minor">
-              <a:schemeClr val="lt1"/>
-            </a:fontRef>
-          </p:style>
-          <p:txBody>
-            <a:bodyPr lIns="252000" rtlCol="0" anchor="ctr"/>
-            <a:lstStyle/>
-            <a:p>
-              <a:pPr algn="ctr"/>
-              <a:endParaRPr lang="ko-KR" altLang="en-US" sz="1600" dirty="0">
-                <a:solidFill>
-                  <a:srgbClr val="00B050"/>
-                </a:solidFill>
-                <a:latin typeface="Courier New" pitchFamily="49" charset="0"/>
-                <a:ea typeface="맑은 고딕" pitchFamily="50" charset="-127"/>
-                <a:cs typeface="Courier New" pitchFamily="49" charset="0"/>
-              </a:endParaRPr>
-            </a:p>
-          </p:txBody>
-        </p:sp>
-        <p:sp>
-          <p:nvSpPr>
-            <p:cNvPr id="24" name="직사각형 23"/>
-            <p:cNvSpPr/>
-            <p:nvPr/>
-          </p:nvSpPr>
-          <p:spPr>
-            <a:xfrm>
-              <a:off x="1183706" y="4004728"/>
-              <a:ext cx="54000" cy="360000"/>
-            </a:xfrm>
-            <a:prstGeom prst="rect">
-              <a:avLst/>
-            </a:prstGeom>
-            <a:solidFill>
-              <a:schemeClr val="tx1"/>
-            </a:solidFill>
-            <a:ln w="9525">
-              <a:solidFill>
-                <a:schemeClr val="tx1"/>
-              </a:solidFill>
-            </a:ln>
-            <a:effectLst/>
-          </p:spPr>
-          <p:style>
-            <a:lnRef idx="3">
-              <a:schemeClr val="lt1"/>
-            </a:lnRef>
-            <a:fillRef idx="1">
-              <a:schemeClr val="accent1"/>
-            </a:fillRef>
-            <a:effectRef idx="1">
-              <a:schemeClr val="accent1"/>
-            </a:effectRef>
-            <a:fontRef idx="minor">
-              <a:schemeClr val="lt1"/>
-            </a:fontRef>
-          </p:style>
-          <p:txBody>
-            <a:bodyPr lIns="252000" rtlCol="0" anchor="ctr"/>
-            <a:lstStyle/>
-            <a:p>
-              <a:pPr algn="ctr"/>
-              <a:endParaRPr lang="ko-KR" altLang="en-US" sz="1600" dirty="0">
-                <a:solidFill>
-                  <a:srgbClr val="00B050"/>
-                </a:solidFill>
-                <a:latin typeface="Courier New" pitchFamily="49" charset="0"/>
-                <a:ea typeface="맑은 고딕" pitchFamily="50" charset="-127"/>
-                <a:cs typeface="Courier New" pitchFamily="49" charset="0"/>
-              </a:endParaRPr>
-            </a:p>
-          </p:txBody>
-        </p:sp>
-        <p:sp>
-          <p:nvSpPr>
-            <p:cNvPr id="25" name="직사각형 24"/>
-            <p:cNvSpPr/>
-            <p:nvPr/>
-          </p:nvSpPr>
-          <p:spPr>
-            <a:xfrm>
-              <a:off x="1243599" y="2204864"/>
-              <a:ext cx="144000" cy="360000"/>
-            </a:xfrm>
-            <a:prstGeom prst="rect">
-              <a:avLst/>
-            </a:prstGeom>
-            <a:pattFill prst="wdDnDiag">
-              <a:fgClr>
-                <a:schemeClr val="tx1"/>
-              </a:fgClr>
-              <a:bgClr>
-                <a:schemeClr val="bg1"/>
-              </a:bgClr>
-            </a:pattFill>
-            <a:ln w="9525">
-              <a:solidFill>
-                <a:schemeClr val="tx1"/>
-              </a:solidFill>
-            </a:ln>
-            <a:effectLst/>
-          </p:spPr>
-          <p:style>
-            <a:lnRef idx="3">
-              <a:schemeClr val="lt1"/>
-            </a:lnRef>
-            <a:fillRef idx="1">
-              <a:schemeClr val="accent1"/>
-            </a:fillRef>
-            <a:effectRef idx="1">
-              <a:schemeClr val="accent1"/>
-            </a:effectRef>
-            <a:fontRef idx="minor">
-              <a:schemeClr val="lt1"/>
-            </a:fontRef>
-          </p:style>
-          <p:txBody>
-            <a:bodyPr lIns="252000" rtlCol="0" anchor="ctr"/>
-            <a:lstStyle/>
-            <a:p>
-              <a:pPr algn="ctr"/>
-              <a:endParaRPr lang="ko-KR" altLang="en-US" sz="1600" dirty="0">
-                <a:solidFill>
-                  <a:srgbClr val="00B050"/>
-                </a:solidFill>
-                <a:latin typeface="Courier New" pitchFamily="49" charset="0"/>
-                <a:ea typeface="맑은 고딕" pitchFamily="50" charset="-127"/>
-                <a:cs typeface="Courier New" pitchFamily="49" charset="0"/>
-              </a:endParaRPr>
-            </a:p>
-          </p:txBody>
-        </p:sp>
-        <p:sp>
-          <p:nvSpPr>
-            <p:cNvPr id="26" name="직사각형 25"/>
-            <p:cNvSpPr/>
-            <p:nvPr/>
-          </p:nvSpPr>
-          <p:spPr>
-            <a:xfrm>
-              <a:off x="1387599" y="4004768"/>
-              <a:ext cx="54000" cy="360000"/>
-            </a:xfrm>
-            <a:prstGeom prst="rect">
-              <a:avLst/>
-            </a:prstGeom>
-            <a:solidFill>
-              <a:schemeClr val="tx1"/>
-            </a:solidFill>
-            <a:ln w="9525">
-              <a:solidFill>
-                <a:schemeClr val="tx1"/>
-              </a:solidFill>
-            </a:ln>
-            <a:effectLst/>
-          </p:spPr>
-          <p:style>
-            <a:lnRef idx="3">
-              <a:schemeClr val="lt1"/>
-            </a:lnRef>
-            <a:fillRef idx="1">
-              <a:schemeClr val="accent1"/>
-            </a:fillRef>
-            <a:effectRef idx="1">
-              <a:schemeClr val="accent1"/>
-            </a:effectRef>
-            <a:fontRef idx="minor">
-              <a:schemeClr val="lt1"/>
-            </a:fontRef>
-          </p:style>
-          <p:txBody>
-            <a:bodyPr lIns="252000" rtlCol="0" anchor="ctr"/>
-            <a:lstStyle/>
-            <a:p>
-              <a:pPr algn="ctr"/>
-              <a:endParaRPr lang="ko-KR" altLang="en-US" sz="1600" dirty="0">
-                <a:solidFill>
-                  <a:srgbClr val="00B050"/>
-                </a:solidFill>
-                <a:latin typeface="Courier New" pitchFamily="49" charset="0"/>
-                <a:ea typeface="맑은 고딕" pitchFamily="50" charset="-127"/>
-                <a:cs typeface="Courier New" pitchFamily="49" charset="0"/>
-              </a:endParaRPr>
-            </a:p>
-          </p:txBody>
-        </p:sp>
-        <p:sp>
-          <p:nvSpPr>
-            <p:cNvPr id="27" name="직사각형 26"/>
-            <p:cNvSpPr/>
-            <p:nvPr/>
-          </p:nvSpPr>
-          <p:spPr>
-            <a:xfrm>
-              <a:off x="1447492" y="2204904"/>
-              <a:ext cx="144000" cy="360000"/>
-            </a:xfrm>
-            <a:prstGeom prst="rect">
-              <a:avLst/>
-            </a:prstGeom>
-            <a:pattFill prst="wdDnDiag">
-              <a:fgClr>
-                <a:schemeClr val="tx1"/>
-              </a:fgClr>
-              <a:bgClr>
-                <a:schemeClr val="bg1"/>
-              </a:bgClr>
-            </a:pattFill>
-            <a:ln w="9525">
-              <a:solidFill>
-                <a:schemeClr val="tx1"/>
-              </a:solidFill>
-            </a:ln>
-            <a:effectLst/>
-          </p:spPr>
-          <p:style>
-            <a:lnRef idx="3">
-              <a:schemeClr val="lt1"/>
-            </a:lnRef>
-            <a:fillRef idx="1">
-              <a:schemeClr val="accent1"/>
-            </a:fillRef>
-            <a:effectRef idx="1">
-              <a:schemeClr val="accent1"/>
-            </a:effectRef>
-            <a:fontRef idx="minor">
-              <a:schemeClr val="lt1"/>
-            </a:fontRef>
-          </p:style>
-          <p:txBody>
-            <a:bodyPr lIns="252000" rtlCol="0" anchor="ctr"/>
-            <a:lstStyle/>
-            <a:p>
-              <a:pPr algn="ctr"/>
-              <a:endParaRPr lang="ko-KR" altLang="en-US" sz="1600" dirty="0">
-                <a:solidFill>
-                  <a:srgbClr val="00B050"/>
-                </a:solidFill>
-                <a:latin typeface="Courier New" pitchFamily="49" charset="0"/>
-                <a:ea typeface="맑은 고딕" pitchFamily="50" charset="-127"/>
-                <a:cs typeface="Courier New" pitchFamily="49" charset="0"/>
-              </a:endParaRPr>
-            </a:p>
-          </p:txBody>
-        </p:sp>
-        <p:sp>
-          <p:nvSpPr>
-            <p:cNvPr id="28" name="직사각형 27"/>
-            <p:cNvSpPr/>
-            <p:nvPr/>
-          </p:nvSpPr>
-          <p:spPr>
-            <a:xfrm>
-              <a:off x="1591492" y="4004728"/>
-              <a:ext cx="54000" cy="360000"/>
-            </a:xfrm>
-            <a:prstGeom prst="rect">
-              <a:avLst/>
-            </a:prstGeom>
-            <a:solidFill>
-              <a:schemeClr val="tx1"/>
-            </a:solidFill>
-            <a:ln w="9525">
-              <a:solidFill>
-                <a:schemeClr val="tx1"/>
-              </a:solidFill>
-            </a:ln>
-            <a:effectLst/>
-          </p:spPr>
-          <p:style>
-            <a:lnRef idx="3">
-              <a:schemeClr val="lt1"/>
-            </a:lnRef>
-            <a:fillRef idx="1">
-              <a:schemeClr val="accent1"/>
-            </a:fillRef>
-            <a:effectRef idx="1">
-              <a:schemeClr val="accent1"/>
-            </a:effectRef>
-            <a:fontRef idx="minor">
-              <a:schemeClr val="lt1"/>
-            </a:fontRef>
-          </p:style>
-          <p:txBody>
-            <a:bodyPr lIns="252000" rtlCol="0" anchor="ctr"/>
-            <a:lstStyle/>
-            <a:p>
-              <a:pPr algn="ctr"/>
-              <a:endParaRPr lang="ko-KR" altLang="en-US" sz="1600" dirty="0">
-                <a:solidFill>
-                  <a:srgbClr val="00B050"/>
-                </a:solidFill>
-                <a:latin typeface="Courier New" pitchFamily="49" charset="0"/>
-                <a:ea typeface="맑은 고딕" pitchFamily="50" charset="-127"/>
-                <a:cs typeface="Courier New" pitchFamily="49" charset="0"/>
-              </a:endParaRPr>
-            </a:p>
-          </p:txBody>
-        </p:sp>
-        <p:sp>
-          <p:nvSpPr>
-            <p:cNvPr id="29" name="직사각형 28"/>
-            <p:cNvSpPr/>
-            <p:nvPr/>
-          </p:nvSpPr>
-          <p:spPr>
-            <a:xfrm>
-              <a:off x="1651385" y="2204864"/>
-              <a:ext cx="144000" cy="360000"/>
-            </a:xfrm>
-            <a:prstGeom prst="rect">
-              <a:avLst/>
-            </a:prstGeom>
-            <a:pattFill prst="wdDnDiag">
-              <a:fgClr>
-                <a:schemeClr val="tx1"/>
-              </a:fgClr>
-              <a:bgClr>
-                <a:schemeClr val="bg1"/>
-              </a:bgClr>
-            </a:pattFill>
-            <a:ln w="9525">
-              <a:solidFill>
-                <a:schemeClr val="tx1"/>
-              </a:solidFill>
-            </a:ln>
-            <a:effectLst/>
-          </p:spPr>
-          <p:style>
-            <a:lnRef idx="3">
-              <a:schemeClr val="lt1"/>
-            </a:lnRef>
-            <a:fillRef idx="1">
-              <a:schemeClr val="accent1"/>
-            </a:fillRef>
-            <a:effectRef idx="1">
-              <a:schemeClr val="accent1"/>
-            </a:effectRef>
-            <a:fontRef idx="minor">
-              <a:schemeClr val="lt1"/>
-            </a:fontRef>
-          </p:style>
-          <p:txBody>
-            <a:bodyPr lIns="252000" rtlCol="0" anchor="ctr"/>
-            <a:lstStyle/>
-            <a:p>
-              <a:pPr algn="ctr"/>
-              <a:endParaRPr lang="ko-KR" altLang="en-US" sz="1600" dirty="0">
-                <a:solidFill>
-                  <a:srgbClr val="00B050"/>
-                </a:solidFill>
-                <a:latin typeface="Courier New" pitchFamily="49" charset="0"/>
-                <a:ea typeface="맑은 고딕" pitchFamily="50" charset="-127"/>
-                <a:cs typeface="Courier New" pitchFamily="49" charset="0"/>
-              </a:endParaRPr>
-            </a:p>
-          </p:txBody>
-        </p:sp>
-        <p:sp>
-          <p:nvSpPr>
-            <p:cNvPr id="30" name="직사각형 29"/>
-            <p:cNvSpPr/>
-            <p:nvPr/>
-          </p:nvSpPr>
-          <p:spPr>
-            <a:xfrm>
-              <a:off x="1778820" y="4004768"/>
-              <a:ext cx="54000" cy="360000"/>
-            </a:xfrm>
-            <a:prstGeom prst="rect">
-              <a:avLst/>
-            </a:prstGeom>
-            <a:solidFill>
-              <a:schemeClr val="tx1"/>
-            </a:solidFill>
-            <a:ln w="9525">
-              <a:solidFill>
-                <a:schemeClr val="tx1"/>
-              </a:solidFill>
-            </a:ln>
-            <a:effectLst/>
-          </p:spPr>
-          <p:style>
-            <a:lnRef idx="3">
-              <a:schemeClr val="lt1"/>
-            </a:lnRef>
-            <a:fillRef idx="1">
-              <a:schemeClr val="accent1"/>
-            </a:fillRef>
-            <a:effectRef idx="1">
-              <a:schemeClr val="accent1"/>
-            </a:effectRef>
-            <a:fontRef idx="minor">
-              <a:schemeClr val="lt1"/>
-            </a:fontRef>
-          </p:style>
-          <p:txBody>
-            <a:bodyPr lIns="252000" rtlCol="0" anchor="ctr"/>
-            <a:lstStyle/>
-            <a:p>
-              <a:pPr algn="ctr"/>
-              <a:endParaRPr lang="ko-KR" altLang="en-US" sz="1600" dirty="0">
-                <a:solidFill>
-                  <a:srgbClr val="00B050"/>
-                </a:solidFill>
-                <a:latin typeface="Courier New" pitchFamily="49" charset="0"/>
-                <a:ea typeface="맑은 고딕" pitchFamily="50" charset="-127"/>
-                <a:cs typeface="Courier New" pitchFamily="49" charset="0"/>
-              </a:endParaRPr>
-            </a:p>
-          </p:txBody>
-        </p:sp>
-        <p:sp>
-          <p:nvSpPr>
-            <p:cNvPr id="31" name="직사각형 30"/>
-            <p:cNvSpPr/>
-            <p:nvPr/>
-          </p:nvSpPr>
-          <p:spPr>
-            <a:xfrm>
-              <a:off x="1838713" y="2204904"/>
-              <a:ext cx="144000" cy="360000"/>
-            </a:xfrm>
-            <a:prstGeom prst="rect">
-              <a:avLst/>
-            </a:prstGeom>
-            <a:pattFill prst="wdDnDiag">
-              <a:fgClr>
-                <a:schemeClr val="tx1"/>
-              </a:fgClr>
-              <a:bgClr>
-                <a:schemeClr val="bg1"/>
-              </a:bgClr>
-            </a:pattFill>
-            <a:ln w="9525">
-              <a:solidFill>
-                <a:schemeClr val="tx1"/>
-              </a:solidFill>
-            </a:ln>
-            <a:effectLst/>
-          </p:spPr>
-          <p:style>
-            <a:lnRef idx="3">
-              <a:schemeClr val="lt1"/>
-            </a:lnRef>
-            <a:fillRef idx="1">
-              <a:schemeClr val="accent1"/>
-            </a:fillRef>
-            <a:effectRef idx="1">
-              <a:schemeClr val="accent1"/>
-            </a:effectRef>
-            <a:fontRef idx="minor">
-              <a:schemeClr val="lt1"/>
-            </a:fontRef>
-          </p:style>
-          <p:txBody>
-            <a:bodyPr lIns="252000" rtlCol="0" anchor="ctr"/>
-            <a:lstStyle/>
-            <a:p>
-              <a:pPr algn="ctr"/>
-              <a:endParaRPr lang="ko-KR" altLang="en-US" sz="1600" dirty="0">
-                <a:solidFill>
-                  <a:srgbClr val="00B050"/>
-                </a:solidFill>
-                <a:latin typeface="Courier New" pitchFamily="49" charset="0"/>
-                <a:ea typeface="맑은 고딕" pitchFamily="50" charset="-127"/>
-                <a:cs typeface="Courier New" pitchFamily="49" charset="0"/>
-              </a:endParaRPr>
-            </a:p>
-          </p:txBody>
-        </p:sp>
-        <p:sp>
-          <p:nvSpPr>
-            <p:cNvPr id="32" name="직사각형 31"/>
-            <p:cNvSpPr/>
-            <p:nvPr/>
-          </p:nvSpPr>
-          <p:spPr>
-            <a:xfrm>
-              <a:off x="1982713" y="4004728"/>
-              <a:ext cx="54000" cy="360000"/>
-            </a:xfrm>
-            <a:prstGeom prst="rect">
-              <a:avLst/>
-            </a:prstGeom>
-            <a:solidFill>
-              <a:schemeClr val="tx1"/>
-            </a:solidFill>
-            <a:ln w="9525">
-              <a:solidFill>
-                <a:schemeClr val="tx1"/>
-              </a:solidFill>
-            </a:ln>
-            <a:effectLst/>
-          </p:spPr>
-          <p:style>
-            <a:lnRef idx="3">
-              <a:schemeClr val="lt1"/>
-            </a:lnRef>
-            <a:fillRef idx="1">
-              <a:schemeClr val="accent1"/>
-            </a:fillRef>
-            <a:effectRef idx="1">
-              <a:schemeClr val="accent1"/>
-            </a:effectRef>
-            <a:fontRef idx="minor">
-              <a:schemeClr val="lt1"/>
-            </a:fontRef>
-          </p:style>
-          <p:txBody>
-            <a:bodyPr lIns="252000" rtlCol="0" anchor="ctr"/>
-            <a:lstStyle/>
-            <a:p>
-              <a:pPr algn="ctr"/>
-              <a:endParaRPr lang="ko-KR" altLang="en-US" sz="1600" dirty="0">
-                <a:solidFill>
-                  <a:srgbClr val="00B050"/>
-                </a:solidFill>
-                <a:latin typeface="Courier New" pitchFamily="49" charset="0"/>
-                <a:ea typeface="맑은 고딕" pitchFamily="50" charset="-127"/>
-                <a:cs typeface="Courier New" pitchFamily="49" charset="0"/>
-              </a:endParaRPr>
-            </a:p>
-          </p:txBody>
-        </p:sp>
-        <p:sp>
-          <p:nvSpPr>
-            <p:cNvPr id="33" name="직사각형 32"/>
-            <p:cNvSpPr/>
-            <p:nvPr/>
-          </p:nvSpPr>
-          <p:spPr>
-            <a:xfrm>
-              <a:off x="2042606" y="2204864"/>
-              <a:ext cx="144000" cy="360000"/>
-            </a:xfrm>
-            <a:prstGeom prst="rect">
-              <a:avLst/>
-            </a:prstGeom>
-            <a:pattFill prst="wdDnDiag">
-              <a:fgClr>
-                <a:schemeClr val="tx1"/>
-              </a:fgClr>
-              <a:bgClr>
-                <a:schemeClr val="bg1"/>
-              </a:bgClr>
-            </a:pattFill>
-            <a:ln w="9525">
-              <a:solidFill>
-                <a:schemeClr val="tx1"/>
-              </a:solidFill>
-            </a:ln>
-            <a:effectLst/>
-          </p:spPr>
-          <p:style>
-            <a:lnRef idx="3">
-              <a:schemeClr val="lt1"/>
-            </a:lnRef>
-            <a:fillRef idx="1">
-              <a:schemeClr val="accent1"/>
-            </a:fillRef>
-            <a:effectRef idx="1">
-              <a:schemeClr val="accent1"/>
-            </a:effectRef>
-            <a:fontRef idx="minor">
-              <a:schemeClr val="lt1"/>
-            </a:fontRef>
-          </p:style>
-          <p:txBody>
-            <a:bodyPr lIns="252000" rtlCol="0" anchor="ctr"/>
-            <a:lstStyle/>
-            <a:p>
-              <a:pPr algn="ctr"/>
-              <a:endParaRPr lang="ko-KR" altLang="en-US" sz="1600" dirty="0">
-                <a:solidFill>
-                  <a:srgbClr val="00B050"/>
-                </a:solidFill>
-                <a:latin typeface="Courier New" pitchFamily="49" charset="0"/>
-                <a:ea typeface="맑은 고딕" pitchFamily="50" charset="-127"/>
-                <a:cs typeface="Courier New" pitchFamily="49" charset="0"/>
-              </a:endParaRPr>
-            </a:p>
-          </p:txBody>
-        </p:sp>
-        <p:sp>
-          <p:nvSpPr>
-            <p:cNvPr id="34" name="직사각형 33"/>
-            <p:cNvSpPr/>
-            <p:nvPr/>
-          </p:nvSpPr>
-          <p:spPr>
-            <a:xfrm>
-              <a:off x="2179687" y="4004768"/>
-              <a:ext cx="54000" cy="360000"/>
-            </a:xfrm>
-            <a:prstGeom prst="rect">
-              <a:avLst/>
-            </a:prstGeom>
-            <a:solidFill>
-              <a:schemeClr val="tx1"/>
-            </a:solidFill>
-            <a:ln w="9525">
-              <a:solidFill>
-                <a:schemeClr val="tx1"/>
-              </a:solidFill>
-            </a:ln>
-            <a:effectLst/>
-          </p:spPr>
-          <p:style>
-            <a:lnRef idx="3">
-              <a:schemeClr val="lt1"/>
-            </a:lnRef>
-            <a:fillRef idx="1">
-              <a:schemeClr val="accent1"/>
-            </a:fillRef>
-            <a:effectRef idx="1">
-              <a:schemeClr val="accent1"/>
-            </a:effectRef>
-            <a:fontRef idx="minor">
-              <a:schemeClr val="lt1"/>
-            </a:fontRef>
-          </p:style>
-          <p:txBody>
-            <a:bodyPr lIns="252000" rtlCol="0" anchor="ctr"/>
-            <a:lstStyle/>
-            <a:p>
-              <a:pPr algn="ctr"/>
-              <a:endParaRPr lang="ko-KR" altLang="en-US" sz="1600" dirty="0">
-                <a:solidFill>
-                  <a:srgbClr val="00B050"/>
-                </a:solidFill>
-                <a:latin typeface="Courier New" pitchFamily="49" charset="0"/>
-                <a:ea typeface="맑은 고딕" pitchFamily="50" charset="-127"/>
-                <a:cs typeface="Courier New" pitchFamily="49" charset="0"/>
-              </a:endParaRPr>
-            </a:p>
-          </p:txBody>
-        </p:sp>
-        <p:sp>
-          <p:nvSpPr>
-            <p:cNvPr id="35" name="직사각형 34"/>
-            <p:cNvSpPr/>
-            <p:nvPr/>
-          </p:nvSpPr>
-          <p:spPr>
-            <a:xfrm>
-              <a:off x="2239580" y="2204904"/>
-              <a:ext cx="144000" cy="360000"/>
-            </a:xfrm>
-            <a:prstGeom prst="rect">
-              <a:avLst/>
-            </a:prstGeom>
-            <a:pattFill prst="wdDnDiag">
-              <a:fgClr>
-                <a:schemeClr val="tx1"/>
-              </a:fgClr>
-              <a:bgClr>
-                <a:schemeClr val="bg1"/>
-              </a:bgClr>
-            </a:pattFill>
-            <a:ln w="9525">
-              <a:solidFill>
-                <a:schemeClr val="tx1"/>
-              </a:solidFill>
-            </a:ln>
-            <a:effectLst/>
-          </p:spPr>
-          <p:style>
-            <a:lnRef idx="3">
-              <a:schemeClr val="lt1"/>
-            </a:lnRef>
-            <a:fillRef idx="1">
-              <a:schemeClr val="accent1"/>
-            </a:fillRef>
-            <a:effectRef idx="1">
-              <a:schemeClr val="accent1"/>
-            </a:effectRef>
-            <a:fontRef idx="minor">
-              <a:schemeClr val="lt1"/>
-            </a:fontRef>
-          </p:style>
-          <p:txBody>
-            <a:bodyPr lIns="252000" rtlCol="0" anchor="ctr"/>
-            <a:lstStyle/>
-            <a:p>
-              <a:pPr algn="ctr"/>
-              <a:endParaRPr lang="ko-KR" altLang="en-US" sz="1600" dirty="0">
-                <a:solidFill>
-                  <a:srgbClr val="00B050"/>
-                </a:solidFill>
-                <a:latin typeface="Courier New" pitchFamily="49" charset="0"/>
-                <a:ea typeface="맑은 고딕" pitchFamily="50" charset="-127"/>
-                <a:cs typeface="Courier New" pitchFamily="49" charset="0"/>
-              </a:endParaRPr>
-            </a:p>
-          </p:txBody>
-        </p:sp>
-        <p:sp>
-          <p:nvSpPr>
-            <p:cNvPr id="36" name="직사각형 35"/>
-            <p:cNvSpPr/>
-            <p:nvPr/>
-          </p:nvSpPr>
-          <p:spPr>
-            <a:xfrm>
-              <a:off x="2383580" y="4004728"/>
-              <a:ext cx="54000" cy="360000"/>
-            </a:xfrm>
-            <a:prstGeom prst="rect">
-              <a:avLst/>
-            </a:prstGeom>
-            <a:solidFill>
-              <a:schemeClr val="tx1"/>
-            </a:solidFill>
-            <a:ln w="9525">
-              <a:solidFill>
-                <a:schemeClr val="tx1"/>
-              </a:solidFill>
-            </a:ln>
-            <a:effectLst/>
-          </p:spPr>
-          <p:style>
-            <a:lnRef idx="3">
-              <a:schemeClr val="lt1"/>
-            </a:lnRef>
-            <a:fillRef idx="1">
-              <a:schemeClr val="accent1"/>
-            </a:fillRef>
-            <a:effectRef idx="1">
-              <a:schemeClr val="accent1"/>
-            </a:effectRef>
-            <a:fontRef idx="minor">
-              <a:schemeClr val="lt1"/>
-            </a:fontRef>
-          </p:style>
-          <p:txBody>
-            <a:bodyPr lIns="252000" rtlCol="0" anchor="ctr"/>
-            <a:lstStyle/>
-            <a:p>
-              <a:pPr algn="ctr"/>
-              <a:endParaRPr lang="ko-KR" altLang="en-US" sz="1600" dirty="0">
-                <a:solidFill>
-                  <a:srgbClr val="00B050"/>
-                </a:solidFill>
-                <a:latin typeface="Courier New" pitchFamily="49" charset="0"/>
-                <a:ea typeface="맑은 고딕" pitchFamily="50" charset="-127"/>
-                <a:cs typeface="Courier New" pitchFamily="49" charset="0"/>
-              </a:endParaRPr>
-            </a:p>
-          </p:txBody>
-        </p:sp>
-        <p:sp>
-          <p:nvSpPr>
-            <p:cNvPr id="37" name="직사각형 36"/>
-            <p:cNvSpPr/>
-            <p:nvPr/>
-          </p:nvSpPr>
-          <p:spPr>
-            <a:xfrm>
-              <a:off x="2443473" y="2204864"/>
-              <a:ext cx="144000" cy="360000"/>
-            </a:xfrm>
-            <a:prstGeom prst="rect">
-              <a:avLst/>
-            </a:prstGeom>
-            <a:pattFill prst="wdDnDiag">
-              <a:fgClr>
-                <a:schemeClr val="tx1"/>
-              </a:fgClr>
-              <a:bgClr>
-                <a:schemeClr val="bg1"/>
-              </a:bgClr>
-            </a:pattFill>
-            <a:ln w="9525">
-              <a:solidFill>
-                <a:schemeClr val="tx1"/>
-              </a:solidFill>
-            </a:ln>
-            <a:effectLst/>
-          </p:spPr>
-          <p:style>
-            <a:lnRef idx="3">
-              <a:schemeClr val="lt1"/>
-            </a:lnRef>
-            <a:fillRef idx="1">
-              <a:schemeClr val="accent1"/>
-            </a:fillRef>
-            <a:effectRef idx="1">
-              <a:schemeClr val="accent1"/>
-            </a:effectRef>
-            <a:fontRef idx="minor">
-              <a:schemeClr val="lt1"/>
-            </a:fontRef>
-          </p:style>
-          <p:txBody>
-            <a:bodyPr lIns="252000" rtlCol="0" anchor="ctr"/>
-            <a:lstStyle/>
-            <a:p>
-              <a:pPr algn="ctr"/>
-              <a:endParaRPr lang="ko-KR" altLang="en-US" sz="1600" dirty="0">
-                <a:solidFill>
-                  <a:srgbClr val="00B050"/>
-                </a:solidFill>
-                <a:latin typeface="Courier New" pitchFamily="49" charset="0"/>
-                <a:ea typeface="맑은 고딕" pitchFamily="50" charset="-127"/>
-                <a:cs typeface="Courier New" pitchFamily="49" charset="0"/>
-              </a:endParaRPr>
-            </a:p>
-          </p:txBody>
-        </p:sp>
-        <p:sp>
-          <p:nvSpPr>
-            <p:cNvPr id="38" name="직사각형 37"/>
-            <p:cNvSpPr/>
-            <p:nvPr/>
-          </p:nvSpPr>
-          <p:spPr>
-            <a:xfrm>
-              <a:off x="2570908" y="4004768"/>
-              <a:ext cx="54000" cy="360000"/>
-            </a:xfrm>
-            <a:prstGeom prst="rect">
-              <a:avLst/>
-            </a:prstGeom>
-            <a:solidFill>
-              <a:schemeClr val="tx1"/>
-            </a:solidFill>
-            <a:ln w="9525">
-              <a:solidFill>
-                <a:schemeClr val="tx1"/>
-              </a:solidFill>
-            </a:ln>
-            <a:effectLst/>
-          </p:spPr>
-          <p:style>
-            <a:lnRef idx="3">
-              <a:schemeClr val="lt1"/>
-            </a:lnRef>
-            <a:fillRef idx="1">
-              <a:schemeClr val="accent1"/>
-            </a:fillRef>
-            <a:effectRef idx="1">
-              <a:schemeClr val="accent1"/>
-            </a:effectRef>
-            <a:fontRef idx="minor">
-              <a:schemeClr val="lt1"/>
-            </a:fontRef>
-          </p:style>
-          <p:txBody>
-            <a:bodyPr lIns="252000" rtlCol="0" anchor="ctr"/>
-            <a:lstStyle/>
-            <a:p>
-              <a:pPr algn="ctr"/>
-              <a:endParaRPr lang="ko-KR" altLang="en-US" sz="1600" dirty="0">
-                <a:solidFill>
-                  <a:srgbClr val="00B050"/>
-                </a:solidFill>
-                <a:latin typeface="Courier New" pitchFamily="49" charset="0"/>
-                <a:ea typeface="맑은 고딕" pitchFamily="50" charset="-127"/>
-                <a:cs typeface="Courier New" pitchFamily="49" charset="0"/>
-              </a:endParaRPr>
-            </a:p>
-          </p:txBody>
-        </p:sp>
-        <p:sp>
-          <p:nvSpPr>
-            <p:cNvPr id="39" name="직사각형 38"/>
-            <p:cNvSpPr/>
-            <p:nvPr/>
-          </p:nvSpPr>
-          <p:spPr>
-            <a:xfrm>
-              <a:off x="2630801" y="2204904"/>
-              <a:ext cx="144000" cy="360000"/>
-            </a:xfrm>
-            <a:prstGeom prst="rect">
-              <a:avLst/>
-            </a:prstGeom>
-            <a:pattFill prst="wdDnDiag">
-              <a:fgClr>
-                <a:schemeClr val="tx1"/>
-              </a:fgClr>
-              <a:bgClr>
-                <a:schemeClr val="bg1"/>
-              </a:bgClr>
-            </a:pattFill>
-            <a:ln w="9525">
-              <a:solidFill>
-                <a:schemeClr val="tx1"/>
-              </a:solidFill>
-            </a:ln>
-            <a:effectLst/>
-          </p:spPr>
-          <p:style>
-            <a:lnRef idx="3">
-              <a:schemeClr val="lt1"/>
-            </a:lnRef>
-            <a:fillRef idx="1">
-              <a:schemeClr val="accent1"/>
-            </a:fillRef>
-            <a:effectRef idx="1">
-              <a:schemeClr val="accent1"/>
-            </a:effectRef>
-            <a:fontRef idx="minor">
-              <a:schemeClr val="lt1"/>
-            </a:fontRef>
-          </p:style>
-          <p:txBody>
-            <a:bodyPr lIns="252000" rtlCol="0" anchor="ctr"/>
-            <a:lstStyle/>
-            <a:p>
-              <a:pPr algn="ctr"/>
-              <a:endParaRPr lang="ko-KR" altLang="en-US" sz="1600" dirty="0">
-                <a:solidFill>
-                  <a:srgbClr val="00B050"/>
-                </a:solidFill>
-                <a:latin typeface="Courier New" pitchFamily="49" charset="0"/>
-                <a:ea typeface="맑은 고딕" pitchFamily="50" charset="-127"/>
-                <a:cs typeface="Courier New" pitchFamily="49" charset="0"/>
-              </a:endParaRPr>
-            </a:p>
-          </p:txBody>
-        </p:sp>
-        <p:sp>
-          <p:nvSpPr>
-            <p:cNvPr id="40" name="직사각형 39"/>
-            <p:cNvSpPr/>
-            <p:nvPr/>
-          </p:nvSpPr>
-          <p:spPr>
-            <a:xfrm>
-              <a:off x="2774801" y="4004728"/>
-              <a:ext cx="54000" cy="360000"/>
-            </a:xfrm>
-            <a:prstGeom prst="rect">
-              <a:avLst/>
-            </a:prstGeom>
-            <a:solidFill>
-              <a:schemeClr val="tx1"/>
-            </a:solidFill>
-            <a:ln w="9525">
-              <a:solidFill>
-                <a:schemeClr val="tx1"/>
-              </a:solidFill>
-            </a:ln>
-            <a:effectLst/>
-          </p:spPr>
-          <p:style>
-            <a:lnRef idx="3">
-              <a:schemeClr val="lt1"/>
-            </a:lnRef>
-            <a:fillRef idx="1">
-              <a:schemeClr val="accent1"/>
-            </a:fillRef>
-            <a:effectRef idx="1">
-              <a:schemeClr val="accent1"/>
-            </a:effectRef>
-            <a:fontRef idx="minor">
-              <a:schemeClr val="lt1"/>
-            </a:fontRef>
-          </p:style>
-          <p:txBody>
-            <a:bodyPr lIns="252000" rtlCol="0" anchor="ctr"/>
-            <a:lstStyle/>
-            <a:p>
-              <a:pPr algn="ctr"/>
-              <a:endParaRPr lang="ko-KR" altLang="en-US" sz="1600" dirty="0">
-                <a:solidFill>
-                  <a:srgbClr val="00B050"/>
-                </a:solidFill>
-                <a:latin typeface="Courier New" pitchFamily="49" charset="0"/>
-                <a:ea typeface="맑은 고딕" pitchFamily="50" charset="-127"/>
-                <a:cs typeface="Courier New" pitchFamily="49" charset="0"/>
-              </a:endParaRPr>
-            </a:p>
-          </p:txBody>
-        </p:sp>
-        <p:sp>
-          <p:nvSpPr>
-            <p:cNvPr id="41" name="직사각형 40"/>
-            <p:cNvSpPr/>
-            <p:nvPr/>
-          </p:nvSpPr>
-          <p:spPr>
-            <a:xfrm>
-              <a:off x="2834694" y="2204864"/>
-              <a:ext cx="144000" cy="360000"/>
-            </a:xfrm>
-            <a:prstGeom prst="rect">
-              <a:avLst/>
-            </a:prstGeom>
-            <a:pattFill prst="wdDnDiag">
-              <a:fgClr>
-                <a:schemeClr val="tx1"/>
-              </a:fgClr>
-              <a:bgClr>
-                <a:schemeClr val="bg1"/>
-              </a:bgClr>
-            </a:pattFill>
-            <a:ln w="9525">
-              <a:solidFill>
-                <a:schemeClr val="tx1"/>
-              </a:solidFill>
-            </a:ln>
-            <a:effectLst/>
-          </p:spPr>
-          <p:style>
-            <a:lnRef idx="3">
-              <a:schemeClr val="lt1"/>
-            </a:lnRef>
-            <a:fillRef idx="1">
-              <a:schemeClr val="accent1"/>
-            </a:fillRef>
-            <a:effectRef idx="1">
-              <a:schemeClr val="accent1"/>
-            </a:effectRef>
-            <a:fontRef idx="minor">
-              <a:schemeClr val="lt1"/>
-            </a:fontRef>
-          </p:style>
-          <p:txBody>
-            <a:bodyPr lIns="252000" rtlCol="0" anchor="ctr"/>
-            <a:lstStyle/>
-            <a:p>
-              <a:pPr algn="ctr"/>
-              <a:endParaRPr lang="ko-KR" altLang="en-US" sz="1600" dirty="0">
-                <a:solidFill>
-                  <a:srgbClr val="00B050"/>
-                </a:solidFill>
-                <a:latin typeface="Courier New" pitchFamily="49" charset="0"/>
-                <a:ea typeface="맑은 고딕" pitchFamily="50" charset="-127"/>
-                <a:cs typeface="Courier New" pitchFamily="49" charset="0"/>
-              </a:endParaRPr>
-            </a:p>
-          </p:txBody>
-        </p:sp>
-        <p:sp>
-          <p:nvSpPr>
-            <p:cNvPr id="42" name="직사각형 41"/>
-            <p:cNvSpPr/>
-            <p:nvPr/>
-          </p:nvSpPr>
-          <p:spPr>
-            <a:xfrm>
-              <a:off x="2978694" y="4004768"/>
-              <a:ext cx="54000" cy="360000"/>
-            </a:xfrm>
-            <a:prstGeom prst="rect">
-              <a:avLst/>
-            </a:prstGeom>
-            <a:solidFill>
-              <a:schemeClr val="tx1"/>
-            </a:solidFill>
-            <a:ln w="9525">
-              <a:solidFill>
-                <a:schemeClr val="tx1"/>
-              </a:solidFill>
-            </a:ln>
-            <a:effectLst/>
-          </p:spPr>
-          <p:style>
-            <a:lnRef idx="3">
-              <a:schemeClr val="lt1"/>
-            </a:lnRef>
-            <a:fillRef idx="1">
-              <a:schemeClr val="accent1"/>
-            </a:fillRef>
-            <a:effectRef idx="1">
-              <a:schemeClr val="accent1"/>
-            </a:effectRef>
-            <a:fontRef idx="minor">
-              <a:schemeClr val="lt1"/>
-            </a:fontRef>
-          </p:style>
-          <p:txBody>
-            <a:bodyPr lIns="252000" rtlCol="0" anchor="ctr"/>
-            <a:lstStyle/>
-            <a:p>
-              <a:pPr algn="ctr"/>
-              <a:endParaRPr lang="ko-KR" altLang="en-US" sz="1600" dirty="0">
-                <a:solidFill>
-                  <a:srgbClr val="00B050"/>
-                </a:solidFill>
-                <a:latin typeface="Courier New" pitchFamily="49" charset="0"/>
-                <a:ea typeface="맑은 고딕" pitchFamily="50" charset="-127"/>
-                <a:cs typeface="Courier New" pitchFamily="49" charset="0"/>
-              </a:endParaRPr>
-            </a:p>
-          </p:txBody>
-        </p:sp>
-        <p:sp>
-          <p:nvSpPr>
-            <p:cNvPr id="43" name="직사각형 42"/>
-            <p:cNvSpPr/>
-            <p:nvPr/>
-          </p:nvSpPr>
-          <p:spPr>
-            <a:xfrm>
-              <a:off x="3038587" y="2204904"/>
-              <a:ext cx="144000" cy="360000"/>
-            </a:xfrm>
-            <a:prstGeom prst="rect">
-              <a:avLst/>
-            </a:prstGeom>
-            <a:pattFill prst="wdDnDiag">
-              <a:fgClr>
-                <a:schemeClr val="tx1"/>
-              </a:fgClr>
-              <a:bgClr>
-                <a:schemeClr val="bg1"/>
-              </a:bgClr>
-            </a:pattFill>
-            <a:ln w="9525">
-              <a:solidFill>
-                <a:schemeClr val="tx1"/>
-              </a:solidFill>
-            </a:ln>
-            <a:effectLst/>
-          </p:spPr>
-          <p:style>
-            <a:lnRef idx="3">
-              <a:schemeClr val="lt1"/>
-            </a:lnRef>
-            <a:fillRef idx="1">
-              <a:schemeClr val="accent1"/>
-            </a:fillRef>
-            <a:effectRef idx="1">
-              <a:schemeClr val="accent1"/>
-            </a:effectRef>
-            <a:fontRef idx="minor">
-              <a:schemeClr val="lt1"/>
-            </a:fontRef>
-          </p:style>
-          <p:txBody>
-            <a:bodyPr lIns="252000" rtlCol="0" anchor="ctr"/>
-            <a:lstStyle/>
-            <a:p>
-              <a:pPr algn="ctr"/>
-              <a:endParaRPr lang="ko-KR" altLang="en-US" sz="1600" dirty="0">
-                <a:solidFill>
-                  <a:srgbClr val="00B050"/>
-                </a:solidFill>
-                <a:latin typeface="Courier New" pitchFamily="49" charset="0"/>
-                <a:ea typeface="맑은 고딕" pitchFamily="50" charset="-127"/>
-                <a:cs typeface="Courier New" pitchFamily="49" charset="0"/>
-              </a:endParaRPr>
-            </a:p>
-          </p:txBody>
-        </p:sp>
-        <p:sp>
-          <p:nvSpPr>
-            <p:cNvPr id="44" name="직사각형 43"/>
-            <p:cNvSpPr/>
-            <p:nvPr/>
-          </p:nvSpPr>
-          <p:spPr>
-            <a:xfrm>
-              <a:off x="3182587" y="4004728"/>
-              <a:ext cx="54000" cy="360000"/>
-            </a:xfrm>
-            <a:prstGeom prst="rect">
-              <a:avLst/>
-            </a:prstGeom>
-            <a:solidFill>
-              <a:schemeClr val="tx1"/>
-            </a:solidFill>
-            <a:ln w="9525">
-              <a:solidFill>
-                <a:schemeClr val="tx1"/>
-              </a:solidFill>
-            </a:ln>
-            <a:effectLst/>
-          </p:spPr>
-          <p:style>
-            <a:lnRef idx="3">
-              <a:schemeClr val="lt1"/>
-            </a:lnRef>
-            <a:fillRef idx="1">
-              <a:schemeClr val="accent1"/>
-            </a:fillRef>
-            <a:effectRef idx="1">
-              <a:schemeClr val="accent1"/>
-            </a:effectRef>
-            <a:fontRef idx="minor">
-              <a:schemeClr val="lt1"/>
-            </a:fontRef>
-          </p:style>
-          <p:txBody>
-            <a:bodyPr lIns="252000" rtlCol="0" anchor="ctr"/>
-            <a:lstStyle/>
-            <a:p>
-              <a:pPr algn="ctr"/>
-              <a:endParaRPr lang="ko-KR" altLang="en-US" sz="1600" dirty="0">
-                <a:solidFill>
-                  <a:srgbClr val="00B050"/>
-                </a:solidFill>
-                <a:latin typeface="Courier New" pitchFamily="49" charset="0"/>
-                <a:ea typeface="맑은 고딕" pitchFamily="50" charset="-127"/>
-                <a:cs typeface="Courier New" pitchFamily="49" charset="0"/>
-              </a:endParaRPr>
-            </a:p>
-          </p:txBody>
-        </p:sp>
-        <p:sp>
-          <p:nvSpPr>
-            <p:cNvPr id="45" name="직사각형 44"/>
-            <p:cNvSpPr/>
-            <p:nvPr/>
-          </p:nvSpPr>
-          <p:spPr>
-            <a:xfrm>
-              <a:off x="3242480" y="2204864"/>
-              <a:ext cx="144000" cy="360000"/>
-            </a:xfrm>
-            <a:prstGeom prst="rect">
-              <a:avLst/>
-            </a:prstGeom>
-            <a:pattFill prst="wdDnDiag">
-              <a:fgClr>
-                <a:schemeClr val="tx1"/>
-              </a:fgClr>
-              <a:bgClr>
-                <a:schemeClr val="bg1"/>
-              </a:bgClr>
-            </a:pattFill>
-            <a:ln w="9525">
-              <a:solidFill>
-                <a:schemeClr val="tx1"/>
-              </a:solidFill>
-            </a:ln>
-            <a:effectLst/>
-          </p:spPr>
-          <p:style>
-            <a:lnRef idx="3">
-              <a:schemeClr val="lt1"/>
-            </a:lnRef>
-            <a:fillRef idx="1">
-              <a:schemeClr val="accent1"/>
-            </a:fillRef>
-            <a:effectRef idx="1">
-              <a:schemeClr val="accent1"/>
-            </a:effectRef>
-            <a:fontRef idx="minor">
-              <a:schemeClr val="lt1"/>
-            </a:fontRef>
-          </p:style>
-          <p:txBody>
-            <a:bodyPr lIns="252000" rtlCol="0" anchor="ctr"/>
-            <a:lstStyle/>
-            <a:p>
-              <a:pPr algn="ctr"/>
-              <a:endParaRPr lang="ko-KR" altLang="en-US" sz="1600" dirty="0">
-                <a:solidFill>
-                  <a:srgbClr val="00B050"/>
-                </a:solidFill>
-                <a:latin typeface="Courier New" pitchFamily="49" charset="0"/>
-                <a:ea typeface="맑은 고딕" pitchFamily="50" charset="-127"/>
-                <a:cs typeface="Courier New" pitchFamily="49" charset="0"/>
-              </a:endParaRPr>
-            </a:p>
-          </p:txBody>
-        </p:sp>
-        <p:sp>
-          <p:nvSpPr>
-            <p:cNvPr id="46" name="직사각형 45"/>
-            <p:cNvSpPr/>
-            <p:nvPr/>
-          </p:nvSpPr>
-          <p:spPr>
-            <a:xfrm>
-              <a:off x="3369915" y="4004768"/>
-              <a:ext cx="54000" cy="360000"/>
-            </a:xfrm>
-            <a:prstGeom prst="rect">
-              <a:avLst/>
-            </a:prstGeom>
-            <a:solidFill>
-              <a:schemeClr val="tx1"/>
-            </a:solidFill>
-            <a:ln w="9525">
-              <a:solidFill>
-                <a:schemeClr val="tx1"/>
-              </a:solidFill>
-            </a:ln>
-            <a:effectLst/>
-          </p:spPr>
-          <p:style>
-            <a:lnRef idx="3">
-              <a:schemeClr val="lt1"/>
-            </a:lnRef>
-            <a:fillRef idx="1">
-              <a:schemeClr val="accent1"/>
-            </a:fillRef>
-            <a:effectRef idx="1">
-              <a:schemeClr val="accent1"/>
-            </a:effectRef>
-            <a:fontRef idx="minor">
-              <a:schemeClr val="lt1"/>
-            </a:fontRef>
-          </p:style>
-          <p:txBody>
-            <a:bodyPr lIns="252000" rtlCol="0" anchor="ctr"/>
-            <a:lstStyle/>
-            <a:p>
-              <a:pPr algn="ctr"/>
-              <a:endParaRPr lang="ko-KR" altLang="en-US" sz="1600" dirty="0">
-                <a:solidFill>
-                  <a:srgbClr val="00B050"/>
-                </a:solidFill>
-                <a:latin typeface="Courier New" pitchFamily="49" charset="0"/>
-                <a:ea typeface="맑은 고딕" pitchFamily="50" charset="-127"/>
-                <a:cs typeface="Courier New" pitchFamily="49" charset="0"/>
-              </a:endParaRPr>
-            </a:p>
-          </p:txBody>
-        </p:sp>
-        <p:sp>
-          <p:nvSpPr>
-            <p:cNvPr id="47" name="직사각형 46"/>
-            <p:cNvSpPr/>
-            <p:nvPr/>
-          </p:nvSpPr>
-          <p:spPr>
-            <a:xfrm>
-              <a:off x="3429808" y="2204904"/>
-              <a:ext cx="144000" cy="360000"/>
-            </a:xfrm>
-            <a:prstGeom prst="rect">
-              <a:avLst/>
-            </a:prstGeom>
-            <a:pattFill prst="wdDnDiag">
-              <a:fgClr>
-                <a:schemeClr val="tx1"/>
-              </a:fgClr>
-              <a:bgClr>
-                <a:schemeClr val="bg1"/>
-              </a:bgClr>
-            </a:pattFill>
-            <a:ln w="9525">
-              <a:solidFill>
-                <a:schemeClr val="tx1"/>
-              </a:solidFill>
-            </a:ln>
-            <a:effectLst/>
-          </p:spPr>
-          <p:style>
-            <a:lnRef idx="3">
-              <a:schemeClr val="lt1"/>
-            </a:lnRef>
-            <a:fillRef idx="1">
-              <a:schemeClr val="accent1"/>
-            </a:fillRef>
-            <a:effectRef idx="1">
-              <a:schemeClr val="accent1"/>
-            </a:effectRef>
-            <a:fontRef idx="minor">
-              <a:schemeClr val="lt1"/>
-            </a:fontRef>
-          </p:style>
-          <p:txBody>
-            <a:bodyPr lIns="252000" rtlCol="0" anchor="ctr"/>
-            <a:lstStyle/>
-            <a:p>
-              <a:pPr algn="ctr"/>
-              <a:endParaRPr lang="ko-KR" altLang="en-US" sz="1600" dirty="0">
-                <a:solidFill>
-                  <a:srgbClr val="00B050"/>
-                </a:solidFill>
-                <a:latin typeface="Courier New" pitchFamily="49" charset="0"/>
-                <a:ea typeface="맑은 고딕" pitchFamily="50" charset="-127"/>
-                <a:cs typeface="Courier New" pitchFamily="49" charset="0"/>
-              </a:endParaRPr>
-            </a:p>
-          </p:txBody>
-        </p:sp>
-        <p:sp>
-          <p:nvSpPr>
-            <p:cNvPr id="48" name="직사각형 47"/>
-            <p:cNvSpPr/>
-            <p:nvPr/>
-          </p:nvSpPr>
-          <p:spPr>
-            <a:xfrm>
-              <a:off x="3573808" y="4004728"/>
-              <a:ext cx="54000" cy="360000"/>
-            </a:xfrm>
-            <a:prstGeom prst="rect">
-              <a:avLst/>
-            </a:prstGeom>
-            <a:solidFill>
-              <a:schemeClr val="tx1"/>
-            </a:solidFill>
-            <a:ln w="9525">
-              <a:solidFill>
-                <a:schemeClr val="tx1"/>
-              </a:solidFill>
-            </a:ln>
-            <a:effectLst/>
-          </p:spPr>
-          <p:style>
-            <a:lnRef idx="3">
-              <a:schemeClr val="lt1"/>
-            </a:lnRef>
-            <a:fillRef idx="1">
-              <a:schemeClr val="accent1"/>
-            </a:fillRef>
-            <a:effectRef idx="1">
-              <a:schemeClr val="accent1"/>
-            </a:effectRef>
-            <a:fontRef idx="minor">
-              <a:schemeClr val="lt1"/>
-            </a:fontRef>
-          </p:style>
-          <p:txBody>
-            <a:bodyPr lIns="252000" rtlCol="0" anchor="ctr"/>
-            <a:lstStyle/>
-            <a:p>
-              <a:pPr algn="ctr"/>
-              <a:endParaRPr lang="ko-KR" altLang="en-US" sz="1600" dirty="0">
-                <a:solidFill>
-                  <a:srgbClr val="00B050"/>
-                </a:solidFill>
-                <a:latin typeface="Courier New" pitchFamily="49" charset="0"/>
-                <a:ea typeface="맑은 고딕" pitchFamily="50" charset="-127"/>
-                <a:cs typeface="Courier New" pitchFamily="49" charset="0"/>
-              </a:endParaRPr>
-            </a:p>
-          </p:txBody>
-        </p:sp>
-        <p:sp>
-          <p:nvSpPr>
-            <p:cNvPr id="49" name="직사각형 48"/>
-            <p:cNvSpPr/>
-            <p:nvPr/>
-          </p:nvSpPr>
-          <p:spPr>
-            <a:xfrm>
-              <a:off x="3633701" y="2204864"/>
-              <a:ext cx="144000" cy="360000"/>
-            </a:xfrm>
-            <a:prstGeom prst="rect">
-              <a:avLst/>
-            </a:prstGeom>
-            <a:pattFill prst="wdDnDiag">
-              <a:fgClr>
-                <a:schemeClr val="tx1"/>
-              </a:fgClr>
-              <a:bgClr>
-                <a:schemeClr val="bg1"/>
-              </a:bgClr>
-            </a:pattFill>
-            <a:ln w="9525">
-              <a:solidFill>
-                <a:schemeClr val="tx1"/>
-              </a:solidFill>
-            </a:ln>
-            <a:effectLst/>
-          </p:spPr>
-          <p:style>
-            <a:lnRef idx="3">
-              <a:schemeClr val="lt1"/>
-            </a:lnRef>
-            <a:fillRef idx="1">
-              <a:schemeClr val="accent1"/>
-            </a:fillRef>
-            <a:effectRef idx="1">
-              <a:schemeClr val="accent1"/>
-            </a:effectRef>
-            <a:fontRef idx="minor">
-              <a:schemeClr val="lt1"/>
-            </a:fontRef>
-          </p:style>
-          <p:txBody>
-            <a:bodyPr lIns="252000" rtlCol="0" anchor="ctr"/>
-            <a:lstStyle/>
-            <a:p>
-              <a:pPr algn="ctr"/>
-              <a:endParaRPr lang="ko-KR" altLang="en-US" sz="1600" dirty="0">
-                <a:solidFill>
-                  <a:srgbClr val="00B050"/>
-                </a:solidFill>
-                <a:latin typeface="Courier New" pitchFamily="49" charset="0"/>
-                <a:ea typeface="맑은 고딕" pitchFamily="50" charset="-127"/>
-                <a:cs typeface="Courier New" pitchFamily="49" charset="0"/>
-              </a:endParaRPr>
-            </a:p>
-          </p:txBody>
-        </p:sp>
-        <p:sp>
-          <p:nvSpPr>
-            <p:cNvPr id="50" name="직사각형 49"/>
-            <p:cNvSpPr/>
-            <p:nvPr/>
-          </p:nvSpPr>
-          <p:spPr>
-            <a:xfrm>
-              <a:off x="3763863" y="4004768"/>
-              <a:ext cx="54000" cy="360000"/>
-            </a:xfrm>
-            <a:prstGeom prst="rect">
-              <a:avLst/>
-            </a:prstGeom>
-            <a:solidFill>
-              <a:schemeClr val="tx1"/>
-            </a:solidFill>
-            <a:ln w="9525">
-              <a:solidFill>
-                <a:schemeClr val="tx1"/>
-              </a:solidFill>
-            </a:ln>
-            <a:effectLst/>
-          </p:spPr>
-          <p:style>
-            <a:lnRef idx="3">
-              <a:schemeClr val="lt1"/>
-            </a:lnRef>
-            <a:fillRef idx="1">
-              <a:schemeClr val="accent1"/>
-            </a:fillRef>
-            <a:effectRef idx="1">
-              <a:schemeClr val="accent1"/>
-            </a:effectRef>
-            <a:fontRef idx="minor">
-              <a:schemeClr val="lt1"/>
-            </a:fontRef>
-          </p:style>
-          <p:txBody>
-            <a:bodyPr lIns="252000" rtlCol="0" anchor="ctr"/>
-            <a:lstStyle/>
-            <a:p>
-              <a:pPr algn="ctr"/>
-              <a:endParaRPr lang="ko-KR" altLang="en-US" sz="1600" dirty="0">
-                <a:solidFill>
-                  <a:srgbClr val="00B050"/>
-                </a:solidFill>
-                <a:latin typeface="Courier New" pitchFamily="49" charset="0"/>
-                <a:ea typeface="맑은 고딕" pitchFamily="50" charset="-127"/>
-                <a:cs typeface="Courier New" pitchFamily="49" charset="0"/>
-              </a:endParaRPr>
-            </a:p>
-          </p:txBody>
-        </p:sp>
-        <p:sp>
-          <p:nvSpPr>
-            <p:cNvPr id="51" name="직사각형 50"/>
-            <p:cNvSpPr/>
-            <p:nvPr/>
-          </p:nvSpPr>
-          <p:spPr>
-            <a:xfrm>
-              <a:off x="3823756" y="2204904"/>
-              <a:ext cx="144000" cy="360000"/>
-            </a:xfrm>
-            <a:prstGeom prst="rect">
-              <a:avLst/>
-            </a:prstGeom>
-            <a:pattFill prst="wdDnDiag">
-              <a:fgClr>
-                <a:schemeClr val="tx1"/>
-              </a:fgClr>
-              <a:bgClr>
-                <a:schemeClr val="bg1"/>
-              </a:bgClr>
-            </a:pattFill>
-            <a:ln w="9525">
-              <a:solidFill>
-                <a:schemeClr val="tx1"/>
-              </a:solidFill>
-            </a:ln>
-            <a:effectLst/>
-          </p:spPr>
-          <p:style>
-            <a:lnRef idx="3">
-              <a:schemeClr val="lt1"/>
-            </a:lnRef>
-            <a:fillRef idx="1">
-              <a:schemeClr val="accent1"/>
-            </a:fillRef>
-            <a:effectRef idx="1">
-              <a:schemeClr val="accent1"/>
-            </a:effectRef>
-            <a:fontRef idx="minor">
-              <a:schemeClr val="lt1"/>
-            </a:fontRef>
-          </p:style>
-          <p:txBody>
-            <a:bodyPr lIns="252000" rtlCol="0" anchor="ctr"/>
-            <a:lstStyle/>
-            <a:p>
-              <a:pPr algn="ctr"/>
-              <a:endParaRPr lang="ko-KR" altLang="en-US" sz="1600" dirty="0">
-                <a:solidFill>
-                  <a:srgbClr val="00B050"/>
-                </a:solidFill>
-                <a:latin typeface="Courier New" pitchFamily="49" charset="0"/>
-                <a:ea typeface="맑은 고딕" pitchFamily="50" charset="-127"/>
-                <a:cs typeface="Courier New" pitchFamily="49" charset="0"/>
-              </a:endParaRPr>
-            </a:p>
-          </p:txBody>
-        </p:sp>
-        <p:sp>
-          <p:nvSpPr>
-            <p:cNvPr id="52" name="직사각형 51"/>
-            <p:cNvSpPr/>
-            <p:nvPr/>
-          </p:nvSpPr>
-          <p:spPr>
-            <a:xfrm>
-              <a:off x="3967756" y="4004728"/>
-              <a:ext cx="54000" cy="360000"/>
-            </a:xfrm>
-            <a:prstGeom prst="rect">
-              <a:avLst/>
-            </a:prstGeom>
-            <a:solidFill>
-              <a:schemeClr val="tx1"/>
-            </a:solidFill>
-            <a:ln w="9525">
-              <a:solidFill>
-                <a:schemeClr val="tx1"/>
-              </a:solidFill>
-            </a:ln>
-            <a:effectLst/>
-          </p:spPr>
-          <p:style>
-            <a:lnRef idx="3">
-              <a:schemeClr val="lt1"/>
-            </a:lnRef>
-            <a:fillRef idx="1">
-              <a:schemeClr val="accent1"/>
-            </a:fillRef>
-            <a:effectRef idx="1">
-              <a:schemeClr val="accent1"/>
-            </a:effectRef>
-            <a:fontRef idx="minor">
-              <a:schemeClr val="lt1"/>
-            </a:fontRef>
-          </p:style>
-          <p:txBody>
-            <a:bodyPr lIns="252000" rtlCol="0" anchor="ctr"/>
-            <a:lstStyle/>
-            <a:p>
-              <a:pPr algn="ctr"/>
-              <a:endParaRPr lang="ko-KR" altLang="en-US" sz="1600" dirty="0">
-                <a:solidFill>
-                  <a:srgbClr val="00B050"/>
-                </a:solidFill>
-                <a:latin typeface="Courier New" pitchFamily="49" charset="0"/>
-                <a:ea typeface="맑은 고딕" pitchFamily="50" charset="-127"/>
-                <a:cs typeface="Courier New" pitchFamily="49" charset="0"/>
-              </a:endParaRPr>
-            </a:p>
-          </p:txBody>
-        </p:sp>
-        <p:sp>
-          <p:nvSpPr>
-            <p:cNvPr id="53" name="직사각형 52"/>
-            <p:cNvSpPr/>
-            <p:nvPr/>
-          </p:nvSpPr>
-          <p:spPr>
-            <a:xfrm>
-              <a:off x="4027649" y="2204864"/>
-              <a:ext cx="144000" cy="360000"/>
-            </a:xfrm>
-            <a:prstGeom prst="rect">
-              <a:avLst/>
-            </a:prstGeom>
-            <a:pattFill prst="wdDnDiag">
-              <a:fgClr>
-                <a:schemeClr val="tx1"/>
-              </a:fgClr>
-              <a:bgClr>
-                <a:schemeClr val="bg1"/>
-              </a:bgClr>
-            </a:pattFill>
-            <a:ln w="9525">
-              <a:solidFill>
-                <a:schemeClr val="tx1"/>
-              </a:solidFill>
-            </a:ln>
-            <a:effectLst/>
-          </p:spPr>
-          <p:style>
-            <a:lnRef idx="3">
-              <a:schemeClr val="lt1"/>
-            </a:lnRef>
-            <a:fillRef idx="1">
-              <a:schemeClr val="accent1"/>
-            </a:fillRef>
-            <a:effectRef idx="1">
-              <a:schemeClr val="accent1"/>
-            </a:effectRef>
-            <a:fontRef idx="minor">
-              <a:schemeClr val="lt1"/>
-            </a:fontRef>
-          </p:style>
-          <p:txBody>
-            <a:bodyPr lIns="252000" rtlCol="0" anchor="ctr"/>
-            <a:lstStyle/>
-            <a:p>
-              <a:pPr algn="ctr"/>
-              <a:endParaRPr lang="ko-KR" altLang="en-US" sz="1600" dirty="0">
-                <a:solidFill>
-                  <a:srgbClr val="00B050"/>
-                </a:solidFill>
-                <a:latin typeface="Courier New" pitchFamily="49" charset="0"/>
-                <a:ea typeface="맑은 고딕" pitchFamily="50" charset="-127"/>
-                <a:cs typeface="Courier New" pitchFamily="49" charset="0"/>
-              </a:endParaRPr>
-            </a:p>
-          </p:txBody>
-        </p:sp>
-      </p:grpSp>
-      <p:grpSp>
-        <p:nvGrpSpPr>
-          <p:cNvPr id="54" name="그룹 53"/>
-          <p:cNvGrpSpPr/>
-          <p:nvPr/>
-        </p:nvGrpSpPr>
-        <p:grpSpPr>
-          <a:xfrm>
-            <a:off x="4516041" y="3565167"/>
-            <a:ext cx="4448447" cy="2456121"/>
-            <a:chOff x="4516041" y="2204864"/>
-            <a:chExt cx="4448447" cy="2456121"/>
-          </a:xfrm>
-        </p:grpSpPr>
-        <p:cxnSp>
-          <p:nvCxnSpPr>
-            <p:cNvPr id="55" name="직선 연결선 54"/>
-            <p:cNvCxnSpPr/>
-            <p:nvPr/>
-          </p:nvCxnSpPr>
-          <p:spPr>
-            <a:xfrm>
-              <a:off x="5153684" y="3644826"/>
-              <a:ext cx="3600000" cy="0"/>
-            </a:xfrm>
-            <a:prstGeom prst="line">
-              <a:avLst/>
-            </a:prstGeom>
-            <a:ln w="19050">
-              <a:solidFill>
-                <a:schemeClr val="tx1"/>
-              </a:solidFill>
-              <a:prstDash val="sysDot"/>
-              <a:tailEnd type="none"/>
-            </a:ln>
-          </p:spPr>
-          <p:style>
-            <a:lnRef idx="1">
-              <a:schemeClr val="accent1"/>
-            </a:lnRef>
-            <a:fillRef idx="0">
-              <a:schemeClr val="accent1"/>
-            </a:fillRef>
-            <a:effectRef idx="0">
-              <a:schemeClr val="accent1"/>
-            </a:effectRef>
-            <a:fontRef idx="minor">
-              <a:schemeClr val="tx1"/>
-            </a:fontRef>
-          </p:style>
-        </p:cxnSp>
-        <p:cxnSp>
-          <p:nvCxnSpPr>
-            <p:cNvPr id="56" name="직선 연결선 55"/>
-            <p:cNvCxnSpPr/>
-            <p:nvPr/>
-          </p:nvCxnSpPr>
-          <p:spPr>
-            <a:xfrm>
-              <a:off x="5148064" y="4379767"/>
-              <a:ext cx="3600000" cy="0"/>
-            </a:xfrm>
-            <a:prstGeom prst="line">
-              <a:avLst/>
-            </a:prstGeom>
-            <a:ln w="19050">
-              <a:solidFill>
-                <a:schemeClr val="tx1"/>
-              </a:solidFill>
-              <a:prstDash val="sysDot"/>
-              <a:tailEnd type="none"/>
-            </a:ln>
-          </p:spPr>
-          <p:style>
-            <a:lnRef idx="1">
-              <a:schemeClr val="accent1"/>
-            </a:lnRef>
-            <a:fillRef idx="0">
-              <a:schemeClr val="accent1"/>
-            </a:fillRef>
-            <a:effectRef idx="0">
-              <a:schemeClr val="accent1"/>
-            </a:effectRef>
-            <a:fontRef idx="minor">
-              <a:schemeClr val="tx1"/>
-            </a:fontRef>
-          </p:style>
-        </p:cxnSp>
-        <p:sp>
-          <p:nvSpPr>
-            <p:cNvPr id="57" name="직사각형 56"/>
-            <p:cNvSpPr/>
-            <p:nvPr/>
-          </p:nvSpPr>
-          <p:spPr>
-            <a:xfrm>
-              <a:off x="5302273" y="4005104"/>
-              <a:ext cx="54000" cy="360000"/>
-            </a:xfrm>
-            <a:prstGeom prst="rect">
-              <a:avLst/>
-            </a:prstGeom>
-            <a:solidFill>
-              <a:schemeClr val="tx1"/>
-            </a:solidFill>
-            <a:ln w="9525">
-              <a:solidFill>
-                <a:schemeClr val="tx1"/>
-              </a:solidFill>
-            </a:ln>
-            <a:effectLst/>
-          </p:spPr>
-          <p:style>
-            <a:lnRef idx="3">
-              <a:schemeClr val="lt1"/>
-            </a:lnRef>
-            <a:fillRef idx="1">
-              <a:schemeClr val="accent1"/>
-            </a:fillRef>
-            <a:effectRef idx="1">
-              <a:schemeClr val="accent1"/>
-            </a:effectRef>
-            <a:fontRef idx="minor">
-              <a:schemeClr val="lt1"/>
-            </a:fontRef>
-          </p:style>
-          <p:txBody>
-            <a:bodyPr lIns="252000" rtlCol="0" anchor="ctr"/>
-            <a:lstStyle/>
-            <a:p>
-              <a:pPr algn="ctr"/>
-              <a:endParaRPr lang="ko-KR" altLang="en-US" sz="1600" dirty="0">
-                <a:solidFill>
-                  <a:srgbClr val="00B050"/>
-                </a:solidFill>
-                <a:latin typeface="Courier New" pitchFamily="49" charset="0"/>
-                <a:ea typeface="맑은 고딕" pitchFamily="50" charset="-127"/>
-                <a:cs typeface="Courier New" pitchFamily="49" charset="0"/>
-              </a:endParaRPr>
-            </a:p>
-          </p:txBody>
-        </p:sp>
-        <p:sp>
-          <p:nvSpPr>
-            <p:cNvPr id="58" name="TextBox 57"/>
-            <p:cNvSpPr txBox="1"/>
-            <p:nvPr/>
-          </p:nvSpPr>
-          <p:spPr>
-            <a:xfrm>
-              <a:off x="5032623" y="4380538"/>
-              <a:ext cx="216024" cy="276999"/>
-            </a:xfrm>
-            <a:prstGeom prst="rect">
-              <a:avLst/>
-            </a:prstGeom>
-            <a:noFill/>
-          </p:spPr>
-          <p:txBody>
-            <a:bodyPr wrap="square" rtlCol="0">
-              <a:spAutoFit/>
-            </a:bodyPr>
-            <a:lstStyle/>
-            <a:p>
-              <a:pPr algn="ctr"/>
-              <a:r>
-                <a:rPr lang="en-US" altLang="ko-KR" sz="1200" b="1" dirty="0">
-                  <a:solidFill>
-                    <a:prstClr val="black"/>
-                  </a:solidFill>
-                  <a:latin typeface="맑은 고딕" pitchFamily="50" charset="-127"/>
-                  <a:ea typeface="맑은 고딕" pitchFamily="50" charset="-127"/>
-                </a:rPr>
-                <a:t>0</a:t>
-              </a:r>
-              <a:endParaRPr lang="ko-KR" altLang="en-US" sz="1200" b="1" dirty="0">
-                <a:solidFill>
-                  <a:prstClr val="black"/>
-                </a:solidFill>
-                <a:latin typeface="맑은 고딕" pitchFamily="50" charset="-127"/>
-                <a:ea typeface="맑은 고딕" pitchFamily="50" charset="-127"/>
-              </a:endParaRPr>
-            </a:p>
-          </p:txBody>
-        </p:sp>
-        <p:sp>
-          <p:nvSpPr>
-            <p:cNvPr id="59" name="TextBox 58"/>
-            <p:cNvSpPr txBox="1"/>
-            <p:nvPr/>
-          </p:nvSpPr>
-          <p:spPr>
-            <a:xfrm>
-              <a:off x="5812733" y="4380537"/>
-              <a:ext cx="432048" cy="276999"/>
-            </a:xfrm>
-            <a:prstGeom prst="rect">
-              <a:avLst/>
-            </a:prstGeom>
-            <a:noFill/>
-          </p:spPr>
-          <p:txBody>
-            <a:bodyPr wrap="square" rtlCol="0">
-              <a:spAutoFit/>
-            </a:bodyPr>
-            <a:lstStyle/>
-            <a:p>
-              <a:pPr algn="ctr"/>
-              <a:r>
-                <a:rPr lang="en-US" altLang="ko-KR" sz="1200" b="1" dirty="0">
-                  <a:solidFill>
-                    <a:prstClr val="black"/>
-                  </a:solidFill>
-                  <a:latin typeface="맑은 고딕" pitchFamily="50" charset="-127"/>
-                  <a:ea typeface="맑은 고딕" pitchFamily="50" charset="-127"/>
-                </a:rPr>
-                <a:t>50</a:t>
-              </a:r>
-              <a:endParaRPr lang="ko-KR" altLang="en-US" sz="1200" b="1" dirty="0">
-                <a:solidFill>
-                  <a:prstClr val="black"/>
-                </a:solidFill>
-                <a:latin typeface="맑은 고딕" pitchFamily="50" charset="-127"/>
-                <a:ea typeface="맑은 고딕" pitchFamily="50" charset="-127"/>
-              </a:endParaRPr>
-            </a:p>
-          </p:txBody>
-        </p:sp>
-        <p:sp>
-          <p:nvSpPr>
-            <p:cNvPr id="60" name="TextBox 59"/>
-            <p:cNvSpPr txBox="1"/>
-            <p:nvPr/>
-          </p:nvSpPr>
-          <p:spPr>
-            <a:xfrm>
-              <a:off x="6598606" y="4380536"/>
-              <a:ext cx="555300" cy="276999"/>
-            </a:xfrm>
-            <a:prstGeom prst="rect">
-              <a:avLst/>
-            </a:prstGeom>
-            <a:noFill/>
-          </p:spPr>
-          <p:txBody>
-            <a:bodyPr wrap="square" rtlCol="0">
-              <a:spAutoFit/>
-            </a:bodyPr>
-            <a:lstStyle/>
-            <a:p>
-              <a:pPr algn="ctr"/>
-              <a:r>
-                <a:rPr lang="en-US" altLang="ko-KR" sz="1200" b="1" dirty="0">
-                  <a:solidFill>
-                    <a:prstClr val="black"/>
-                  </a:solidFill>
-                  <a:latin typeface="맑은 고딕" pitchFamily="50" charset="-127"/>
-                  <a:ea typeface="맑은 고딕" pitchFamily="50" charset="-127"/>
-                </a:rPr>
-                <a:t>100</a:t>
-              </a:r>
-              <a:endParaRPr lang="ko-KR" altLang="en-US" sz="1200" b="1" dirty="0">
-                <a:solidFill>
-                  <a:prstClr val="black"/>
-                </a:solidFill>
-                <a:latin typeface="맑은 고딕" pitchFamily="50" charset="-127"/>
-                <a:ea typeface="맑은 고딕" pitchFamily="50" charset="-127"/>
-              </a:endParaRPr>
-            </a:p>
-          </p:txBody>
-        </p:sp>
-        <p:sp>
-          <p:nvSpPr>
-            <p:cNvPr id="61" name="TextBox 60"/>
-            <p:cNvSpPr txBox="1"/>
-            <p:nvPr/>
-          </p:nvSpPr>
-          <p:spPr>
-            <a:xfrm>
-              <a:off x="7506135" y="4383986"/>
-              <a:ext cx="555300" cy="276999"/>
-            </a:xfrm>
-            <a:prstGeom prst="rect">
-              <a:avLst/>
-            </a:prstGeom>
-            <a:noFill/>
-          </p:spPr>
-          <p:txBody>
-            <a:bodyPr wrap="square" rtlCol="0">
-              <a:spAutoFit/>
-            </a:bodyPr>
-            <a:lstStyle/>
-            <a:p>
-              <a:pPr algn="ctr"/>
-              <a:r>
-                <a:rPr lang="en-US" altLang="ko-KR" sz="1200" b="1" dirty="0">
-                  <a:solidFill>
-                    <a:prstClr val="black"/>
-                  </a:solidFill>
-                  <a:latin typeface="맑은 고딕" pitchFamily="50" charset="-127"/>
-                  <a:ea typeface="맑은 고딕" pitchFamily="50" charset="-127"/>
-                </a:rPr>
-                <a:t>150</a:t>
-              </a:r>
-              <a:endParaRPr lang="ko-KR" altLang="en-US" sz="1200" b="1" dirty="0">
-                <a:solidFill>
-                  <a:prstClr val="black"/>
-                </a:solidFill>
-                <a:latin typeface="맑은 고딕" pitchFamily="50" charset="-127"/>
-                <a:ea typeface="맑은 고딕" pitchFamily="50" charset="-127"/>
-              </a:endParaRPr>
-            </a:p>
-          </p:txBody>
-        </p:sp>
-        <p:sp>
-          <p:nvSpPr>
-            <p:cNvPr id="62" name="TextBox 61"/>
-            <p:cNvSpPr txBox="1"/>
-            <p:nvPr/>
-          </p:nvSpPr>
-          <p:spPr>
-            <a:xfrm>
-              <a:off x="8409188" y="4383986"/>
-              <a:ext cx="555300" cy="276999"/>
-            </a:xfrm>
-            <a:prstGeom prst="rect">
-              <a:avLst/>
-            </a:prstGeom>
-            <a:noFill/>
-          </p:spPr>
-          <p:txBody>
-            <a:bodyPr wrap="square" rtlCol="0">
-              <a:spAutoFit/>
-            </a:bodyPr>
-            <a:lstStyle/>
-            <a:p>
-              <a:pPr algn="ctr"/>
-              <a:r>
-                <a:rPr lang="en-US" altLang="ko-KR" sz="1200" b="1" dirty="0">
-                  <a:solidFill>
-                    <a:prstClr val="black"/>
-                  </a:solidFill>
-                  <a:latin typeface="맑은 고딕" pitchFamily="50" charset="-127"/>
-                  <a:ea typeface="맑은 고딕" pitchFamily="50" charset="-127"/>
-                </a:rPr>
-                <a:t>200</a:t>
-              </a:r>
-              <a:endParaRPr lang="ko-KR" altLang="en-US" sz="1200" b="1" dirty="0">
-                <a:solidFill>
-                  <a:prstClr val="black"/>
-                </a:solidFill>
-                <a:latin typeface="맑은 고딕" pitchFamily="50" charset="-127"/>
-                <a:ea typeface="맑은 고딕" pitchFamily="50" charset="-127"/>
-              </a:endParaRPr>
-            </a:p>
-          </p:txBody>
-        </p:sp>
-        <p:sp>
-          <p:nvSpPr>
-            <p:cNvPr id="63" name="TextBox 62"/>
-            <p:cNvSpPr txBox="1"/>
-            <p:nvPr/>
-          </p:nvSpPr>
-          <p:spPr>
-            <a:xfrm>
-              <a:off x="4516041" y="2392887"/>
-              <a:ext cx="632023" cy="369332"/>
-            </a:xfrm>
-            <a:prstGeom prst="rect">
-              <a:avLst/>
-            </a:prstGeom>
-            <a:noFill/>
-          </p:spPr>
-          <p:txBody>
-            <a:bodyPr wrap="square" rtlCol="0">
-              <a:spAutoFit/>
-            </a:bodyPr>
-            <a:lstStyle/>
-            <a:p>
-              <a:pPr algn="r"/>
-              <a:r>
-                <a:rPr lang="en-US" altLang="ko-KR" dirty="0">
-                  <a:solidFill>
-                    <a:prstClr val="black"/>
-                  </a:solidFill>
-                  <a:latin typeface="맑은 고딕" pitchFamily="50" charset="-127"/>
-                  <a:ea typeface="맑은 고딕" pitchFamily="50" charset="-127"/>
-                </a:rPr>
-                <a:t>Q2</a:t>
-              </a:r>
-              <a:endParaRPr lang="ko-KR" altLang="en-US" dirty="0">
-                <a:solidFill>
-                  <a:prstClr val="black"/>
-                </a:solidFill>
-                <a:latin typeface="맑은 고딕" pitchFamily="50" charset="-127"/>
-                <a:ea typeface="맑은 고딕" pitchFamily="50" charset="-127"/>
-              </a:endParaRPr>
-            </a:p>
-          </p:txBody>
-        </p:sp>
-        <p:sp>
-          <p:nvSpPr>
-            <p:cNvPr id="64" name="TextBox 63"/>
-            <p:cNvSpPr txBox="1"/>
-            <p:nvPr/>
-          </p:nvSpPr>
-          <p:spPr>
-            <a:xfrm>
-              <a:off x="4516041" y="3084392"/>
-              <a:ext cx="632023" cy="369332"/>
-            </a:xfrm>
-            <a:prstGeom prst="rect">
-              <a:avLst/>
-            </a:prstGeom>
-            <a:noFill/>
-          </p:spPr>
-          <p:txBody>
-            <a:bodyPr wrap="square" rtlCol="0">
-              <a:spAutoFit/>
-            </a:bodyPr>
-            <a:lstStyle/>
-            <a:p>
-              <a:pPr algn="r"/>
-              <a:r>
-                <a:rPr lang="en-US" altLang="ko-KR" dirty="0">
-                  <a:solidFill>
-                    <a:prstClr val="black"/>
-                  </a:solidFill>
-                  <a:latin typeface="맑은 고딕" pitchFamily="50" charset="-127"/>
-                  <a:ea typeface="맑은 고딕" pitchFamily="50" charset="-127"/>
-                </a:rPr>
-                <a:t>Q1</a:t>
-              </a:r>
-              <a:endParaRPr lang="ko-KR" altLang="en-US" dirty="0">
-                <a:solidFill>
-                  <a:prstClr val="black"/>
-                </a:solidFill>
-                <a:latin typeface="맑은 고딕" pitchFamily="50" charset="-127"/>
-                <a:ea typeface="맑은 고딕" pitchFamily="50" charset="-127"/>
-              </a:endParaRPr>
-            </a:p>
-          </p:txBody>
-        </p:sp>
-        <p:sp>
-          <p:nvSpPr>
-            <p:cNvPr id="65" name="TextBox 64"/>
-            <p:cNvSpPr txBox="1"/>
-            <p:nvPr/>
-          </p:nvSpPr>
-          <p:spPr>
-            <a:xfrm>
-              <a:off x="4516041" y="3804472"/>
-              <a:ext cx="632023" cy="369332"/>
-            </a:xfrm>
-            <a:prstGeom prst="rect">
-              <a:avLst/>
-            </a:prstGeom>
-            <a:noFill/>
-          </p:spPr>
-          <p:txBody>
-            <a:bodyPr wrap="square" rtlCol="0">
-              <a:spAutoFit/>
-            </a:bodyPr>
-            <a:lstStyle/>
-            <a:p>
-              <a:pPr algn="r"/>
-              <a:r>
-                <a:rPr lang="en-US" altLang="ko-KR" dirty="0">
-                  <a:solidFill>
-                    <a:prstClr val="black"/>
-                  </a:solidFill>
-                  <a:latin typeface="맑은 고딕" pitchFamily="50" charset="-127"/>
-                  <a:ea typeface="맑은 고딕" pitchFamily="50" charset="-127"/>
-                </a:rPr>
-                <a:t>Q0</a:t>
-              </a:r>
-              <a:endParaRPr lang="ko-KR" altLang="en-US" dirty="0">
-                <a:solidFill>
-                  <a:prstClr val="black"/>
-                </a:solidFill>
-                <a:latin typeface="맑은 고딕" pitchFamily="50" charset="-127"/>
-                <a:ea typeface="맑은 고딕" pitchFamily="50" charset="-127"/>
-              </a:endParaRPr>
-            </a:p>
-          </p:txBody>
-        </p:sp>
-        <p:cxnSp>
-          <p:nvCxnSpPr>
-            <p:cNvPr id="66" name="직선 연결선 65"/>
-            <p:cNvCxnSpPr/>
-            <p:nvPr/>
-          </p:nvCxnSpPr>
-          <p:spPr>
-            <a:xfrm>
-              <a:off x="5168145" y="2940456"/>
-              <a:ext cx="3600000" cy="0"/>
-            </a:xfrm>
-            <a:prstGeom prst="line">
-              <a:avLst/>
-            </a:prstGeom>
-            <a:ln w="19050">
-              <a:solidFill>
-                <a:schemeClr val="tx1"/>
-              </a:solidFill>
-              <a:prstDash val="sysDot"/>
-              <a:tailEnd type="none"/>
-            </a:ln>
-          </p:spPr>
-          <p:style>
-            <a:lnRef idx="1">
-              <a:schemeClr val="accent1"/>
-            </a:lnRef>
-            <a:fillRef idx="0">
-              <a:schemeClr val="accent1"/>
-            </a:fillRef>
-            <a:effectRef idx="0">
-              <a:schemeClr val="accent1"/>
-            </a:effectRef>
-            <a:fontRef idx="minor">
-              <a:schemeClr val="tx1"/>
-            </a:fontRef>
-          </p:style>
-        </p:cxnSp>
-        <p:sp>
-          <p:nvSpPr>
-            <p:cNvPr id="67" name="직사각형 66"/>
-            <p:cNvSpPr/>
-            <p:nvPr/>
-          </p:nvSpPr>
-          <p:spPr>
-            <a:xfrm>
-              <a:off x="5148064" y="2204904"/>
-              <a:ext cx="144000" cy="360000"/>
-            </a:xfrm>
-            <a:prstGeom prst="rect">
-              <a:avLst/>
-            </a:prstGeom>
-            <a:pattFill prst="wdDnDiag">
-              <a:fgClr>
-                <a:schemeClr val="tx1"/>
-              </a:fgClr>
-              <a:bgClr>
-                <a:schemeClr val="bg1"/>
-              </a:bgClr>
-            </a:pattFill>
-            <a:ln w="9525">
-              <a:solidFill>
-                <a:schemeClr val="tx1"/>
-              </a:solidFill>
-            </a:ln>
-            <a:effectLst/>
-          </p:spPr>
-          <p:style>
-            <a:lnRef idx="3">
-              <a:schemeClr val="lt1"/>
-            </a:lnRef>
-            <a:fillRef idx="1">
-              <a:schemeClr val="accent1"/>
-            </a:fillRef>
-            <a:effectRef idx="1">
-              <a:schemeClr val="accent1"/>
-            </a:effectRef>
-            <a:fontRef idx="minor">
-              <a:schemeClr val="lt1"/>
-            </a:fontRef>
-          </p:style>
-          <p:txBody>
-            <a:bodyPr lIns="252000" rtlCol="0" anchor="ctr"/>
-            <a:lstStyle/>
-            <a:p>
-              <a:pPr algn="ctr"/>
-              <a:endParaRPr lang="ko-KR" altLang="en-US" sz="1600" dirty="0">
-                <a:solidFill>
-                  <a:srgbClr val="00B050"/>
-                </a:solidFill>
-                <a:latin typeface="Courier New" pitchFamily="49" charset="0"/>
-                <a:ea typeface="맑은 고딕" pitchFamily="50" charset="-127"/>
-                <a:cs typeface="Courier New" pitchFamily="49" charset="0"/>
-              </a:endParaRPr>
-            </a:p>
-          </p:txBody>
-        </p:sp>
-        <p:sp>
-          <p:nvSpPr>
-            <p:cNvPr id="68" name="직사각형 67"/>
-            <p:cNvSpPr/>
-            <p:nvPr/>
-          </p:nvSpPr>
-          <p:spPr>
-            <a:xfrm>
-              <a:off x="5355100" y="2204864"/>
-              <a:ext cx="54000" cy="360000"/>
-            </a:xfrm>
-            <a:prstGeom prst="rect">
-              <a:avLst/>
-            </a:prstGeom>
-            <a:pattFill prst="wdDnDiag">
-              <a:fgClr>
-                <a:schemeClr val="tx1"/>
-              </a:fgClr>
-              <a:bgClr>
-                <a:schemeClr val="bg1"/>
-              </a:bgClr>
-            </a:pattFill>
-            <a:ln w="9525">
-              <a:solidFill>
-                <a:schemeClr val="tx1"/>
-              </a:solidFill>
-            </a:ln>
-            <a:effectLst/>
-          </p:spPr>
-          <p:style>
-            <a:lnRef idx="3">
-              <a:schemeClr val="lt1"/>
-            </a:lnRef>
-            <a:fillRef idx="1">
-              <a:schemeClr val="accent1"/>
-            </a:fillRef>
-            <a:effectRef idx="1">
-              <a:schemeClr val="accent1"/>
-            </a:effectRef>
-            <a:fontRef idx="minor">
-              <a:schemeClr val="lt1"/>
-            </a:fontRef>
-          </p:style>
-          <p:txBody>
-            <a:bodyPr lIns="252000" rtlCol="0" anchor="ctr"/>
-            <a:lstStyle/>
-            <a:p>
-              <a:pPr algn="ctr"/>
-              <a:endParaRPr lang="ko-KR" altLang="en-US" sz="1600" dirty="0">
-                <a:solidFill>
-                  <a:srgbClr val="00B050"/>
-                </a:solidFill>
-                <a:latin typeface="Courier New" pitchFamily="49" charset="0"/>
-                <a:ea typeface="맑은 고딕" pitchFamily="50" charset="-127"/>
-                <a:cs typeface="Courier New" pitchFamily="49" charset="0"/>
-              </a:endParaRPr>
-            </a:p>
-          </p:txBody>
-        </p:sp>
-        <p:sp>
-          <p:nvSpPr>
-            <p:cNvPr id="69" name="직사각형 68"/>
-            <p:cNvSpPr/>
-            <p:nvPr/>
-          </p:nvSpPr>
-          <p:spPr>
-            <a:xfrm>
-              <a:off x="5412651" y="2956244"/>
-              <a:ext cx="144000" cy="360000"/>
-            </a:xfrm>
-            <a:prstGeom prst="rect">
-              <a:avLst/>
-            </a:prstGeom>
-            <a:pattFill prst="wdDnDiag">
-              <a:fgClr>
-                <a:schemeClr val="tx1"/>
-              </a:fgClr>
-              <a:bgClr>
-                <a:schemeClr val="bg1"/>
-              </a:bgClr>
-            </a:pattFill>
-            <a:ln w="9525">
-              <a:solidFill>
-                <a:schemeClr val="tx1"/>
-              </a:solidFill>
-            </a:ln>
-            <a:effectLst/>
-          </p:spPr>
-          <p:style>
-            <a:lnRef idx="3">
-              <a:schemeClr val="lt1"/>
-            </a:lnRef>
-            <a:fillRef idx="1">
-              <a:schemeClr val="accent1"/>
-            </a:fillRef>
-            <a:effectRef idx="1">
-              <a:schemeClr val="accent1"/>
-            </a:effectRef>
-            <a:fontRef idx="minor">
-              <a:schemeClr val="lt1"/>
-            </a:fontRef>
-          </p:style>
-          <p:txBody>
-            <a:bodyPr lIns="252000" rtlCol="0" anchor="ctr"/>
-            <a:lstStyle/>
-            <a:p>
-              <a:pPr algn="ctr"/>
-              <a:endParaRPr lang="ko-KR" altLang="en-US" sz="1600" dirty="0">
-                <a:solidFill>
-                  <a:srgbClr val="00B050"/>
-                </a:solidFill>
-                <a:latin typeface="Courier New" pitchFamily="49" charset="0"/>
-                <a:ea typeface="맑은 고딕" pitchFamily="50" charset="-127"/>
-                <a:cs typeface="Courier New" pitchFamily="49" charset="0"/>
-              </a:endParaRPr>
-            </a:p>
-          </p:txBody>
-        </p:sp>
-        <p:sp>
-          <p:nvSpPr>
-            <p:cNvPr id="70" name="직사각형 69"/>
-            <p:cNvSpPr/>
-            <p:nvPr/>
-          </p:nvSpPr>
-          <p:spPr>
-            <a:xfrm>
-              <a:off x="5619687" y="2956204"/>
-              <a:ext cx="54000" cy="360000"/>
-            </a:xfrm>
-            <a:prstGeom prst="rect">
-              <a:avLst/>
-            </a:prstGeom>
-            <a:pattFill prst="wdDnDiag">
-              <a:fgClr>
-                <a:schemeClr val="tx1"/>
-              </a:fgClr>
-              <a:bgClr>
-                <a:schemeClr val="bg1"/>
-              </a:bgClr>
-            </a:pattFill>
-            <a:ln w="9525">
-              <a:solidFill>
-                <a:schemeClr val="tx1"/>
-              </a:solidFill>
-            </a:ln>
-            <a:effectLst/>
-          </p:spPr>
-          <p:style>
-            <a:lnRef idx="3">
-              <a:schemeClr val="lt1"/>
-            </a:lnRef>
-            <a:fillRef idx="1">
-              <a:schemeClr val="accent1"/>
-            </a:fillRef>
-            <a:effectRef idx="1">
-              <a:schemeClr val="accent1"/>
-            </a:effectRef>
-            <a:fontRef idx="minor">
-              <a:schemeClr val="lt1"/>
-            </a:fontRef>
-          </p:style>
-          <p:txBody>
-            <a:bodyPr lIns="252000" rtlCol="0" anchor="ctr"/>
-            <a:lstStyle/>
-            <a:p>
-              <a:pPr algn="ctr"/>
-              <a:endParaRPr lang="ko-KR" altLang="en-US" sz="1600" dirty="0">
-                <a:solidFill>
-                  <a:srgbClr val="00B050"/>
-                </a:solidFill>
-                <a:latin typeface="Courier New" pitchFamily="49" charset="0"/>
-                <a:ea typeface="맑은 고딕" pitchFamily="50" charset="-127"/>
-                <a:cs typeface="Courier New" pitchFamily="49" charset="0"/>
-              </a:endParaRPr>
-            </a:p>
-          </p:txBody>
-        </p:sp>
-        <p:sp>
-          <p:nvSpPr>
-            <p:cNvPr id="71" name="직사각형 70"/>
-            <p:cNvSpPr/>
-            <p:nvPr/>
-          </p:nvSpPr>
-          <p:spPr>
-            <a:xfrm>
-              <a:off x="5556651" y="4005064"/>
-              <a:ext cx="54000" cy="360000"/>
-            </a:xfrm>
-            <a:prstGeom prst="rect">
-              <a:avLst/>
-            </a:prstGeom>
-            <a:solidFill>
-              <a:schemeClr val="tx1"/>
-            </a:solidFill>
-            <a:ln w="9525">
-              <a:solidFill>
-                <a:schemeClr val="tx1"/>
-              </a:solidFill>
-            </a:ln>
-            <a:effectLst/>
-          </p:spPr>
-          <p:style>
-            <a:lnRef idx="3">
-              <a:schemeClr val="lt1"/>
-            </a:lnRef>
-            <a:fillRef idx="1">
-              <a:schemeClr val="accent1"/>
-            </a:fillRef>
-            <a:effectRef idx="1">
-              <a:schemeClr val="accent1"/>
-            </a:effectRef>
-            <a:fontRef idx="minor">
-              <a:schemeClr val="lt1"/>
-            </a:fontRef>
-          </p:style>
-          <p:txBody>
-            <a:bodyPr lIns="252000" rtlCol="0" anchor="ctr"/>
-            <a:lstStyle/>
-            <a:p>
-              <a:pPr algn="ctr"/>
-              <a:endParaRPr lang="ko-KR" altLang="en-US" sz="1600" dirty="0">
-                <a:solidFill>
-                  <a:srgbClr val="00B050"/>
-                </a:solidFill>
-                <a:latin typeface="Courier New" pitchFamily="49" charset="0"/>
-                <a:ea typeface="맑은 고딕" pitchFamily="50" charset="-127"/>
-                <a:cs typeface="Courier New" pitchFamily="49" charset="0"/>
-              </a:endParaRPr>
-            </a:p>
-          </p:txBody>
-        </p:sp>
-        <p:sp>
-          <p:nvSpPr>
-            <p:cNvPr id="72" name="직사각형 71"/>
-            <p:cNvSpPr/>
-            <p:nvPr/>
-          </p:nvSpPr>
-          <p:spPr>
-            <a:xfrm>
-              <a:off x="5684615" y="4005064"/>
-              <a:ext cx="144000" cy="360000"/>
-            </a:xfrm>
-            <a:prstGeom prst="rect">
-              <a:avLst/>
-            </a:prstGeom>
-            <a:solidFill>
-              <a:schemeClr val="tx1"/>
-            </a:solidFill>
-            <a:ln w="9525">
-              <a:solidFill>
-                <a:schemeClr val="tx1"/>
-              </a:solidFill>
-            </a:ln>
-            <a:effectLst/>
-          </p:spPr>
-          <p:style>
-            <a:lnRef idx="3">
-              <a:schemeClr val="lt1"/>
-            </a:lnRef>
-            <a:fillRef idx="1">
-              <a:schemeClr val="accent1"/>
-            </a:fillRef>
-            <a:effectRef idx="1">
-              <a:schemeClr val="accent1"/>
-            </a:effectRef>
-            <a:fontRef idx="minor">
-              <a:schemeClr val="lt1"/>
-            </a:fontRef>
-          </p:style>
-          <p:txBody>
-            <a:bodyPr lIns="252000" rtlCol="0" anchor="ctr"/>
-            <a:lstStyle/>
-            <a:p>
-              <a:pPr algn="ctr"/>
-              <a:endParaRPr lang="ko-KR" altLang="en-US" sz="1600" dirty="0">
-                <a:solidFill>
-                  <a:srgbClr val="00B050"/>
-                </a:solidFill>
-                <a:latin typeface="Courier New" pitchFamily="49" charset="0"/>
-                <a:ea typeface="맑은 고딕" pitchFamily="50" charset="-127"/>
-                <a:cs typeface="Courier New" pitchFamily="49" charset="0"/>
-              </a:endParaRPr>
-            </a:p>
-          </p:txBody>
-        </p:sp>
-        <p:sp>
-          <p:nvSpPr>
-            <p:cNvPr id="73" name="직사각형 72"/>
-            <p:cNvSpPr/>
-            <p:nvPr/>
-          </p:nvSpPr>
-          <p:spPr>
-            <a:xfrm>
-              <a:off x="5836502" y="3645064"/>
-              <a:ext cx="54000" cy="360000"/>
-            </a:xfrm>
-            <a:prstGeom prst="rect">
-              <a:avLst/>
-            </a:prstGeom>
-            <a:pattFill prst="wdDnDiag">
-              <a:fgClr>
-                <a:schemeClr val="tx1"/>
-              </a:fgClr>
-              <a:bgClr>
-                <a:schemeClr val="bg1"/>
-              </a:bgClr>
-            </a:pattFill>
-            <a:ln w="9525">
-              <a:solidFill>
-                <a:schemeClr val="tx1"/>
-              </a:solidFill>
-            </a:ln>
-            <a:effectLst/>
-          </p:spPr>
-          <p:style>
-            <a:lnRef idx="3">
-              <a:schemeClr val="lt1"/>
-            </a:lnRef>
-            <a:fillRef idx="1">
-              <a:schemeClr val="accent1"/>
-            </a:fillRef>
-            <a:effectRef idx="1">
-              <a:schemeClr val="accent1"/>
-            </a:effectRef>
-            <a:fontRef idx="minor">
-              <a:schemeClr val="lt1"/>
-            </a:fontRef>
-          </p:style>
-          <p:txBody>
-            <a:bodyPr lIns="252000" rtlCol="0" anchor="ctr"/>
-            <a:lstStyle/>
-            <a:p>
-              <a:pPr algn="ctr"/>
-              <a:endParaRPr lang="ko-KR" altLang="en-US" sz="1600" dirty="0">
-                <a:solidFill>
-                  <a:srgbClr val="00B050"/>
-                </a:solidFill>
-                <a:latin typeface="Courier New" pitchFamily="49" charset="0"/>
-                <a:ea typeface="맑은 고딕" pitchFamily="50" charset="-127"/>
-                <a:cs typeface="Courier New" pitchFamily="49" charset="0"/>
-              </a:endParaRPr>
-            </a:p>
-          </p:txBody>
-        </p:sp>
-        <p:sp>
-          <p:nvSpPr>
-            <p:cNvPr id="74" name="직사각형 73"/>
-            <p:cNvSpPr/>
-            <p:nvPr/>
-          </p:nvSpPr>
-          <p:spPr>
-            <a:xfrm>
-              <a:off x="5893911" y="4005024"/>
-              <a:ext cx="144000" cy="360000"/>
-            </a:xfrm>
-            <a:prstGeom prst="rect">
-              <a:avLst/>
-            </a:prstGeom>
-            <a:solidFill>
-              <a:schemeClr val="tx1"/>
-            </a:solidFill>
-            <a:ln w="9525">
-              <a:solidFill>
-                <a:schemeClr val="tx1"/>
-              </a:solidFill>
-            </a:ln>
-            <a:effectLst/>
-          </p:spPr>
-          <p:style>
-            <a:lnRef idx="3">
-              <a:schemeClr val="lt1"/>
-            </a:lnRef>
-            <a:fillRef idx="1">
-              <a:schemeClr val="accent1"/>
-            </a:fillRef>
-            <a:effectRef idx="1">
-              <a:schemeClr val="accent1"/>
-            </a:effectRef>
-            <a:fontRef idx="minor">
-              <a:schemeClr val="lt1"/>
-            </a:fontRef>
-          </p:style>
-          <p:txBody>
-            <a:bodyPr lIns="252000" rtlCol="0" anchor="ctr"/>
-            <a:lstStyle/>
-            <a:p>
-              <a:pPr algn="ctr"/>
-              <a:endParaRPr lang="ko-KR" altLang="en-US" sz="1600" dirty="0">
-                <a:solidFill>
-                  <a:srgbClr val="00B050"/>
-                </a:solidFill>
-                <a:latin typeface="Courier New" pitchFamily="49" charset="0"/>
-                <a:ea typeface="맑은 고딕" pitchFamily="50" charset="-127"/>
-                <a:cs typeface="Courier New" pitchFamily="49" charset="0"/>
-              </a:endParaRPr>
-            </a:p>
-          </p:txBody>
-        </p:sp>
-        <p:sp>
-          <p:nvSpPr>
-            <p:cNvPr id="75" name="직사각형 74"/>
-            <p:cNvSpPr/>
-            <p:nvPr/>
-          </p:nvSpPr>
-          <p:spPr>
-            <a:xfrm>
-              <a:off x="6045798" y="3645024"/>
-              <a:ext cx="54000" cy="360000"/>
-            </a:xfrm>
-            <a:prstGeom prst="rect">
-              <a:avLst/>
-            </a:prstGeom>
-            <a:pattFill prst="wdDnDiag">
-              <a:fgClr>
-                <a:schemeClr val="tx1"/>
-              </a:fgClr>
-              <a:bgClr>
-                <a:schemeClr val="bg1"/>
-              </a:bgClr>
-            </a:pattFill>
-            <a:ln w="9525">
-              <a:solidFill>
-                <a:schemeClr val="tx1"/>
-              </a:solidFill>
-            </a:ln>
-            <a:effectLst/>
-          </p:spPr>
-          <p:style>
-            <a:lnRef idx="3">
-              <a:schemeClr val="lt1"/>
-            </a:lnRef>
-            <a:fillRef idx="1">
-              <a:schemeClr val="accent1"/>
-            </a:fillRef>
-            <a:effectRef idx="1">
-              <a:schemeClr val="accent1"/>
-            </a:effectRef>
-            <a:fontRef idx="minor">
-              <a:schemeClr val="lt1"/>
-            </a:fontRef>
-          </p:style>
-          <p:txBody>
-            <a:bodyPr lIns="252000" rtlCol="0" anchor="ctr"/>
-            <a:lstStyle/>
-            <a:p>
-              <a:pPr algn="ctr"/>
-              <a:endParaRPr lang="ko-KR" altLang="en-US" sz="1600" dirty="0">
-                <a:solidFill>
-                  <a:srgbClr val="00B050"/>
-                </a:solidFill>
-                <a:latin typeface="Courier New" pitchFamily="49" charset="0"/>
-                <a:ea typeface="맑은 고딕" pitchFamily="50" charset="-127"/>
-                <a:cs typeface="Courier New" pitchFamily="49" charset="0"/>
-              </a:endParaRPr>
-            </a:p>
-          </p:txBody>
-        </p:sp>
-        <p:sp>
-          <p:nvSpPr>
-            <p:cNvPr id="76" name="직사각형 75"/>
-            <p:cNvSpPr/>
-            <p:nvPr/>
-          </p:nvSpPr>
-          <p:spPr>
-            <a:xfrm>
-              <a:off x="6094305" y="4005024"/>
-              <a:ext cx="144000" cy="360000"/>
-            </a:xfrm>
-            <a:prstGeom prst="rect">
-              <a:avLst/>
-            </a:prstGeom>
-            <a:solidFill>
-              <a:schemeClr val="tx1"/>
-            </a:solidFill>
-            <a:ln w="9525">
-              <a:solidFill>
-                <a:schemeClr val="tx1"/>
-              </a:solidFill>
-            </a:ln>
-            <a:effectLst/>
-          </p:spPr>
-          <p:style>
-            <a:lnRef idx="3">
-              <a:schemeClr val="lt1"/>
-            </a:lnRef>
-            <a:fillRef idx="1">
-              <a:schemeClr val="accent1"/>
-            </a:fillRef>
-            <a:effectRef idx="1">
-              <a:schemeClr val="accent1"/>
-            </a:effectRef>
-            <a:fontRef idx="minor">
-              <a:schemeClr val="lt1"/>
-            </a:fontRef>
-          </p:style>
-          <p:txBody>
-            <a:bodyPr lIns="252000" rtlCol="0" anchor="ctr"/>
-            <a:lstStyle/>
-            <a:p>
-              <a:pPr algn="ctr"/>
-              <a:endParaRPr lang="ko-KR" altLang="en-US" sz="1600" dirty="0">
-                <a:solidFill>
-                  <a:srgbClr val="00B050"/>
-                </a:solidFill>
-                <a:latin typeface="Courier New" pitchFamily="49" charset="0"/>
-                <a:ea typeface="맑은 고딕" pitchFamily="50" charset="-127"/>
-                <a:cs typeface="Courier New" pitchFamily="49" charset="0"/>
-              </a:endParaRPr>
-            </a:p>
-          </p:txBody>
-        </p:sp>
-        <p:sp>
-          <p:nvSpPr>
-            <p:cNvPr id="77" name="직사각형 76"/>
-            <p:cNvSpPr/>
-            <p:nvPr/>
-          </p:nvSpPr>
-          <p:spPr>
-            <a:xfrm>
-              <a:off x="6246192" y="3645024"/>
-              <a:ext cx="54000" cy="360000"/>
-            </a:xfrm>
-            <a:prstGeom prst="rect">
-              <a:avLst/>
-            </a:prstGeom>
-            <a:pattFill prst="wdDnDiag">
-              <a:fgClr>
-                <a:schemeClr val="tx1"/>
-              </a:fgClr>
-              <a:bgClr>
-                <a:schemeClr val="bg1"/>
-              </a:bgClr>
-            </a:pattFill>
-            <a:ln w="9525">
-              <a:solidFill>
-                <a:schemeClr val="tx1"/>
-              </a:solidFill>
-            </a:ln>
-            <a:effectLst/>
-          </p:spPr>
-          <p:style>
-            <a:lnRef idx="3">
-              <a:schemeClr val="lt1"/>
-            </a:lnRef>
-            <a:fillRef idx="1">
-              <a:schemeClr val="accent1"/>
-            </a:fillRef>
-            <a:effectRef idx="1">
-              <a:schemeClr val="accent1"/>
-            </a:effectRef>
-            <a:fontRef idx="minor">
-              <a:schemeClr val="lt1"/>
-            </a:fontRef>
-          </p:style>
-          <p:txBody>
-            <a:bodyPr lIns="252000" rtlCol="0" anchor="ctr"/>
-            <a:lstStyle/>
-            <a:p>
-              <a:pPr algn="ctr"/>
-              <a:endParaRPr lang="ko-KR" altLang="en-US" sz="1600" dirty="0">
-                <a:solidFill>
-                  <a:srgbClr val="00B050"/>
-                </a:solidFill>
-                <a:latin typeface="Courier New" pitchFamily="49" charset="0"/>
-                <a:ea typeface="맑은 고딕" pitchFamily="50" charset="-127"/>
-                <a:cs typeface="Courier New" pitchFamily="49" charset="0"/>
-              </a:endParaRPr>
-            </a:p>
-          </p:txBody>
-        </p:sp>
-        <p:sp>
-          <p:nvSpPr>
-            <p:cNvPr id="78" name="직사각형 77"/>
-            <p:cNvSpPr/>
-            <p:nvPr/>
-          </p:nvSpPr>
-          <p:spPr>
-            <a:xfrm>
-              <a:off x="6300192" y="4005024"/>
-              <a:ext cx="144000" cy="360000"/>
-            </a:xfrm>
-            <a:prstGeom prst="rect">
-              <a:avLst/>
-            </a:prstGeom>
-            <a:solidFill>
-              <a:schemeClr val="tx1"/>
-            </a:solidFill>
-            <a:ln w="9525">
-              <a:solidFill>
-                <a:schemeClr val="tx1"/>
-              </a:solidFill>
-            </a:ln>
-            <a:effectLst/>
-          </p:spPr>
-          <p:style>
-            <a:lnRef idx="3">
-              <a:schemeClr val="lt1"/>
-            </a:lnRef>
-            <a:fillRef idx="1">
-              <a:schemeClr val="accent1"/>
-            </a:fillRef>
-            <a:effectRef idx="1">
-              <a:schemeClr val="accent1"/>
-            </a:effectRef>
-            <a:fontRef idx="minor">
-              <a:schemeClr val="lt1"/>
-            </a:fontRef>
-          </p:style>
-          <p:txBody>
-            <a:bodyPr lIns="252000" rtlCol="0" anchor="ctr"/>
-            <a:lstStyle/>
-            <a:p>
-              <a:pPr algn="ctr"/>
-              <a:endParaRPr lang="ko-KR" altLang="en-US" sz="1600" dirty="0">
-                <a:solidFill>
-                  <a:srgbClr val="00B050"/>
-                </a:solidFill>
-                <a:latin typeface="Courier New" pitchFamily="49" charset="0"/>
-                <a:ea typeface="맑은 고딕" pitchFamily="50" charset="-127"/>
-                <a:cs typeface="Courier New" pitchFamily="49" charset="0"/>
-              </a:endParaRPr>
-            </a:p>
-          </p:txBody>
-        </p:sp>
-        <p:sp>
-          <p:nvSpPr>
-            <p:cNvPr id="79" name="직사각형 78"/>
-            <p:cNvSpPr/>
-            <p:nvPr/>
-          </p:nvSpPr>
-          <p:spPr>
-            <a:xfrm>
-              <a:off x="6452079" y="3645024"/>
-              <a:ext cx="54000" cy="360000"/>
-            </a:xfrm>
-            <a:prstGeom prst="rect">
-              <a:avLst/>
-            </a:prstGeom>
-            <a:pattFill prst="wdDnDiag">
-              <a:fgClr>
-                <a:schemeClr val="tx1"/>
-              </a:fgClr>
-              <a:bgClr>
-                <a:schemeClr val="bg1"/>
-              </a:bgClr>
-            </a:pattFill>
-            <a:ln w="9525">
-              <a:solidFill>
-                <a:schemeClr val="tx1"/>
-              </a:solidFill>
-            </a:ln>
-            <a:effectLst/>
-          </p:spPr>
-          <p:style>
-            <a:lnRef idx="3">
-              <a:schemeClr val="lt1"/>
-            </a:lnRef>
-            <a:fillRef idx="1">
-              <a:schemeClr val="accent1"/>
-            </a:fillRef>
-            <a:effectRef idx="1">
-              <a:schemeClr val="accent1"/>
-            </a:effectRef>
-            <a:fontRef idx="minor">
-              <a:schemeClr val="lt1"/>
-            </a:fontRef>
-          </p:style>
-          <p:txBody>
-            <a:bodyPr lIns="252000" rtlCol="0" anchor="ctr"/>
-            <a:lstStyle/>
-            <a:p>
-              <a:pPr algn="ctr"/>
-              <a:endParaRPr lang="ko-KR" altLang="en-US" sz="1600" dirty="0">
-                <a:solidFill>
-                  <a:srgbClr val="00B050"/>
-                </a:solidFill>
-                <a:latin typeface="Courier New" pitchFamily="49" charset="0"/>
-                <a:ea typeface="맑은 고딕" pitchFamily="50" charset="-127"/>
-                <a:cs typeface="Courier New" pitchFamily="49" charset="0"/>
-              </a:endParaRPr>
-            </a:p>
-          </p:txBody>
-        </p:sp>
-        <p:sp>
-          <p:nvSpPr>
-            <p:cNvPr id="80" name="직사각형 79"/>
-            <p:cNvSpPr/>
-            <p:nvPr/>
-          </p:nvSpPr>
-          <p:spPr>
-            <a:xfrm>
-              <a:off x="6516216" y="4005024"/>
-              <a:ext cx="144000" cy="360000"/>
-            </a:xfrm>
-            <a:prstGeom prst="rect">
-              <a:avLst/>
-            </a:prstGeom>
-            <a:solidFill>
-              <a:schemeClr val="tx1"/>
-            </a:solidFill>
-            <a:ln w="9525">
-              <a:solidFill>
-                <a:schemeClr val="tx1"/>
-              </a:solidFill>
-            </a:ln>
-            <a:effectLst/>
-          </p:spPr>
-          <p:style>
-            <a:lnRef idx="3">
-              <a:schemeClr val="lt1"/>
-            </a:lnRef>
-            <a:fillRef idx="1">
-              <a:schemeClr val="accent1"/>
-            </a:fillRef>
-            <a:effectRef idx="1">
-              <a:schemeClr val="accent1"/>
-            </a:effectRef>
-            <a:fontRef idx="minor">
-              <a:schemeClr val="lt1"/>
-            </a:fontRef>
-          </p:style>
-          <p:txBody>
-            <a:bodyPr lIns="252000" rtlCol="0" anchor="ctr"/>
-            <a:lstStyle/>
-            <a:p>
-              <a:pPr algn="ctr"/>
-              <a:endParaRPr lang="ko-KR" altLang="en-US" sz="1600" dirty="0">
-                <a:solidFill>
-                  <a:srgbClr val="00B050"/>
-                </a:solidFill>
-                <a:latin typeface="Courier New" pitchFamily="49" charset="0"/>
-                <a:ea typeface="맑은 고딕" pitchFamily="50" charset="-127"/>
-                <a:cs typeface="Courier New" pitchFamily="49" charset="0"/>
-              </a:endParaRPr>
-            </a:p>
-          </p:txBody>
-        </p:sp>
-        <p:sp>
-          <p:nvSpPr>
-            <p:cNvPr id="81" name="직사각형 80"/>
-            <p:cNvSpPr/>
-            <p:nvPr/>
-          </p:nvSpPr>
-          <p:spPr>
-            <a:xfrm>
-              <a:off x="6668103" y="3645024"/>
-              <a:ext cx="54000" cy="360000"/>
-            </a:xfrm>
-            <a:prstGeom prst="rect">
-              <a:avLst/>
-            </a:prstGeom>
-            <a:pattFill prst="wdDnDiag">
-              <a:fgClr>
-                <a:schemeClr val="tx1"/>
-              </a:fgClr>
-              <a:bgClr>
-                <a:schemeClr val="bg1"/>
-              </a:bgClr>
-            </a:pattFill>
-            <a:ln w="9525">
-              <a:solidFill>
-                <a:schemeClr val="tx1"/>
-              </a:solidFill>
-            </a:ln>
-            <a:effectLst/>
-          </p:spPr>
-          <p:style>
-            <a:lnRef idx="3">
-              <a:schemeClr val="lt1"/>
-            </a:lnRef>
-            <a:fillRef idx="1">
-              <a:schemeClr val="accent1"/>
-            </a:fillRef>
-            <a:effectRef idx="1">
-              <a:schemeClr val="accent1"/>
-            </a:effectRef>
-            <a:fontRef idx="minor">
-              <a:schemeClr val="lt1"/>
-            </a:fontRef>
-          </p:style>
-          <p:txBody>
-            <a:bodyPr lIns="252000" rtlCol="0" anchor="ctr"/>
-            <a:lstStyle/>
-            <a:p>
-              <a:pPr algn="ctr"/>
-              <a:endParaRPr lang="ko-KR" altLang="en-US" sz="1600" dirty="0">
-                <a:solidFill>
-                  <a:srgbClr val="00B050"/>
-                </a:solidFill>
-                <a:latin typeface="Courier New" pitchFamily="49" charset="0"/>
-                <a:ea typeface="맑은 고딕" pitchFamily="50" charset="-127"/>
-                <a:cs typeface="Courier New" pitchFamily="49" charset="0"/>
-              </a:endParaRPr>
-            </a:p>
-          </p:txBody>
-        </p:sp>
-        <p:sp>
-          <p:nvSpPr>
-            <p:cNvPr id="82" name="직사각형 81"/>
-            <p:cNvSpPr/>
-            <p:nvPr/>
-          </p:nvSpPr>
-          <p:spPr>
-            <a:xfrm>
-              <a:off x="6732240" y="4005024"/>
-              <a:ext cx="144000" cy="360000"/>
-            </a:xfrm>
-            <a:prstGeom prst="rect">
-              <a:avLst/>
-            </a:prstGeom>
-            <a:solidFill>
-              <a:schemeClr val="tx1"/>
-            </a:solidFill>
-            <a:ln w="9525">
-              <a:solidFill>
-                <a:schemeClr val="tx1"/>
-              </a:solidFill>
-            </a:ln>
-            <a:effectLst/>
-          </p:spPr>
-          <p:style>
-            <a:lnRef idx="3">
-              <a:schemeClr val="lt1"/>
-            </a:lnRef>
-            <a:fillRef idx="1">
-              <a:schemeClr val="accent1"/>
-            </a:fillRef>
-            <a:effectRef idx="1">
-              <a:schemeClr val="accent1"/>
-            </a:effectRef>
-            <a:fontRef idx="minor">
-              <a:schemeClr val="lt1"/>
-            </a:fontRef>
-          </p:style>
-          <p:txBody>
-            <a:bodyPr lIns="252000" rtlCol="0" anchor="ctr"/>
-            <a:lstStyle/>
-            <a:p>
-              <a:pPr algn="ctr"/>
-              <a:endParaRPr lang="ko-KR" altLang="en-US" sz="1600" dirty="0">
-                <a:solidFill>
-                  <a:srgbClr val="00B050"/>
-                </a:solidFill>
-                <a:latin typeface="Courier New" pitchFamily="49" charset="0"/>
-                <a:ea typeface="맑은 고딕" pitchFamily="50" charset="-127"/>
-                <a:cs typeface="Courier New" pitchFamily="49" charset="0"/>
-              </a:endParaRPr>
-            </a:p>
-          </p:txBody>
-        </p:sp>
-        <p:sp>
-          <p:nvSpPr>
-            <p:cNvPr id="83" name="직사각형 82"/>
-            <p:cNvSpPr/>
-            <p:nvPr/>
-          </p:nvSpPr>
-          <p:spPr>
-            <a:xfrm>
-              <a:off x="6884127" y="3645024"/>
-              <a:ext cx="54000" cy="360000"/>
-            </a:xfrm>
-            <a:prstGeom prst="rect">
-              <a:avLst/>
-            </a:prstGeom>
-            <a:pattFill prst="wdDnDiag">
-              <a:fgClr>
-                <a:schemeClr val="tx1"/>
-              </a:fgClr>
-              <a:bgClr>
-                <a:schemeClr val="bg1"/>
-              </a:bgClr>
-            </a:pattFill>
-            <a:ln w="9525">
-              <a:solidFill>
-                <a:schemeClr val="tx1"/>
-              </a:solidFill>
-            </a:ln>
-            <a:effectLst/>
-          </p:spPr>
-          <p:style>
-            <a:lnRef idx="3">
-              <a:schemeClr val="lt1"/>
-            </a:lnRef>
-            <a:fillRef idx="1">
-              <a:schemeClr val="accent1"/>
-            </a:fillRef>
-            <a:effectRef idx="1">
-              <a:schemeClr val="accent1"/>
-            </a:effectRef>
-            <a:fontRef idx="minor">
-              <a:schemeClr val="lt1"/>
-            </a:fontRef>
-          </p:style>
-          <p:txBody>
-            <a:bodyPr lIns="252000" rtlCol="0" anchor="ctr"/>
-            <a:lstStyle/>
-            <a:p>
-              <a:pPr algn="ctr"/>
-              <a:endParaRPr lang="ko-KR" altLang="en-US" sz="1600" dirty="0">
-                <a:solidFill>
-                  <a:srgbClr val="00B050"/>
-                </a:solidFill>
-                <a:latin typeface="Courier New" pitchFamily="49" charset="0"/>
-                <a:ea typeface="맑은 고딕" pitchFamily="50" charset="-127"/>
-                <a:cs typeface="Courier New" pitchFamily="49" charset="0"/>
-              </a:endParaRPr>
-            </a:p>
-          </p:txBody>
-        </p:sp>
-        <p:sp>
-          <p:nvSpPr>
-            <p:cNvPr id="84" name="직사각형 83"/>
-            <p:cNvSpPr/>
-            <p:nvPr/>
-          </p:nvSpPr>
-          <p:spPr>
-            <a:xfrm>
-              <a:off x="6948264" y="4005064"/>
-              <a:ext cx="144000" cy="360000"/>
-            </a:xfrm>
-            <a:prstGeom prst="rect">
-              <a:avLst/>
-            </a:prstGeom>
-            <a:solidFill>
-              <a:schemeClr val="tx1"/>
-            </a:solidFill>
-            <a:ln w="9525">
-              <a:solidFill>
-                <a:schemeClr val="tx1"/>
-              </a:solidFill>
-            </a:ln>
-            <a:effectLst/>
-          </p:spPr>
-          <p:style>
-            <a:lnRef idx="3">
-              <a:schemeClr val="lt1"/>
-            </a:lnRef>
-            <a:fillRef idx="1">
-              <a:schemeClr val="accent1"/>
-            </a:fillRef>
-            <a:effectRef idx="1">
-              <a:schemeClr val="accent1"/>
-            </a:effectRef>
-            <a:fontRef idx="minor">
-              <a:schemeClr val="lt1"/>
-            </a:fontRef>
-          </p:style>
-          <p:txBody>
-            <a:bodyPr lIns="252000" rtlCol="0" anchor="ctr"/>
-            <a:lstStyle/>
-            <a:p>
-              <a:pPr algn="ctr"/>
-              <a:endParaRPr lang="ko-KR" altLang="en-US" sz="1600" dirty="0">
-                <a:solidFill>
-                  <a:srgbClr val="00B050"/>
-                </a:solidFill>
-                <a:latin typeface="Courier New" pitchFamily="49" charset="0"/>
-                <a:ea typeface="맑은 고딕" pitchFamily="50" charset="-127"/>
-                <a:cs typeface="Courier New" pitchFamily="49" charset="0"/>
-              </a:endParaRPr>
-            </a:p>
-          </p:txBody>
-        </p:sp>
-        <p:sp>
-          <p:nvSpPr>
-            <p:cNvPr id="85" name="직사각형 84"/>
-            <p:cNvSpPr/>
-            <p:nvPr/>
-          </p:nvSpPr>
-          <p:spPr>
-            <a:xfrm>
-              <a:off x="7100151" y="3645064"/>
-              <a:ext cx="54000" cy="360000"/>
-            </a:xfrm>
-            <a:prstGeom prst="rect">
-              <a:avLst/>
-            </a:prstGeom>
-            <a:pattFill prst="wdDnDiag">
-              <a:fgClr>
-                <a:schemeClr val="tx1"/>
-              </a:fgClr>
-              <a:bgClr>
-                <a:schemeClr val="bg1"/>
-              </a:bgClr>
-            </a:pattFill>
-            <a:ln w="9525">
-              <a:solidFill>
-                <a:schemeClr val="tx1"/>
-              </a:solidFill>
-            </a:ln>
-            <a:effectLst/>
-          </p:spPr>
-          <p:style>
-            <a:lnRef idx="3">
-              <a:schemeClr val="lt1"/>
-            </a:lnRef>
-            <a:fillRef idx="1">
-              <a:schemeClr val="accent1"/>
-            </a:fillRef>
-            <a:effectRef idx="1">
-              <a:schemeClr val="accent1"/>
-            </a:effectRef>
-            <a:fontRef idx="minor">
-              <a:schemeClr val="lt1"/>
-            </a:fontRef>
-          </p:style>
-          <p:txBody>
-            <a:bodyPr lIns="252000" rtlCol="0" anchor="ctr"/>
-            <a:lstStyle/>
-            <a:p>
-              <a:pPr algn="ctr"/>
-              <a:endParaRPr lang="ko-KR" altLang="en-US" sz="1600" dirty="0">
-                <a:solidFill>
-                  <a:srgbClr val="00B050"/>
-                </a:solidFill>
-                <a:latin typeface="Courier New" pitchFamily="49" charset="0"/>
-                <a:ea typeface="맑은 고딕" pitchFamily="50" charset="-127"/>
-                <a:cs typeface="Courier New" pitchFamily="49" charset="0"/>
-              </a:endParaRPr>
-            </a:p>
-          </p:txBody>
-        </p:sp>
-        <p:sp>
-          <p:nvSpPr>
-            <p:cNvPr id="86" name="직사각형 85"/>
-            <p:cNvSpPr/>
-            <p:nvPr/>
-          </p:nvSpPr>
-          <p:spPr>
-            <a:xfrm>
-              <a:off x="7157560" y="4005024"/>
-              <a:ext cx="144000" cy="360000"/>
-            </a:xfrm>
-            <a:prstGeom prst="rect">
-              <a:avLst/>
-            </a:prstGeom>
-            <a:solidFill>
-              <a:schemeClr val="tx1"/>
-            </a:solidFill>
-            <a:ln w="9525">
-              <a:solidFill>
-                <a:schemeClr val="tx1"/>
-              </a:solidFill>
-            </a:ln>
-            <a:effectLst/>
-          </p:spPr>
-          <p:style>
-            <a:lnRef idx="3">
-              <a:schemeClr val="lt1"/>
-            </a:lnRef>
-            <a:fillRef idx="1">
-              <a:schemeClr val="accent1"/>
-            </a:fillRef>
-            <a:effectRef idx="1">
-              <a:schemeClr val="accent1"/>
-            </a:effectRef>
-            <a:fontRef idx="minor">
-              <a:schemeClr val="lt1"/>
-            </a:fontRef>
-          </p:style>
-          <p:txBody>
-            <a:bodyPr lIns="252000" rtlCol="0" anchor="ctr"/>
-            <a:lstStyle/>
-            <a:p>
-              <a:pPr algn="ctr"/>
-              <a:endParaRPr lang="ko-KR" altLang="en-US" sz="1600" dirty="0">
-                <a:solidFill>
-                  <a:srgbClr val="00B050"/>
-                </a:solidFill>
-                <a:latin typeface="Courier New" pitchFamily="49" charset="0"/>
-                <a:ea typeface="맑은 고딕" pitchFamily="50" charset="-127"/>
-                <a:cs typeface="Courier New" pitchFamily="49" charset="0"/>
-              </a:endParaRPr>
-            </a:p>
-          </p:txBody>
-        </p:sp>
-        <p:sp>
-          <p:nvSpPr>
-            <p:cNvPr id="87" name="직사각형 86"/>
-            <p:cNvSpPr/>
-            <p:nvPr/>
-          </p:nvSpPr>
-          <p:spPr>
-            <a:xfrm>
-              <a:off x="7309447" y="3645024"/>
-              <a:ext cx="54000" cy="360000"/>
-            </a:xfrm>
-            <a:prstGeom prst="rect">
-              <a:avLst/>
-            </a:prstGeom>
-            <a:pattFill prst="wdDnDiag">
-              <a:fgClr>
-                <a:schemeClr val="tx1"/>
-              </a:fgClr>
-              <a:bgClr>
-                <a:schemeClr val="bg1"/>
-              </a:bgClr>
-            </a:pattFill>
-            <a:ln w="9525">
-              <a:solidFill>
-                <a:schemeClr val="tx1"/>
-              </a:solidFill>
-            </a:ln>
-            <a:effectLst/>
-          </p:spPr>
-          <p:style>
-            <a:lnRef idx="3">
-              <a:schemeClr val="lt1"/>
-            </a:lnRef>
-            <a:fillRef idx="1">
-              <a:schemeClr val="accent1"/>
-            </a:fillRef>
-            <a:effectRef idx="1">
-              <a:schemeClr val="accent1"/>
-            </a:effectRef>
-            <a:fontRef idx="minor">
-              <a:schemeClr val="lt1"/>
-            </a:fontRef>
-          </p:style>
-          <p:txBody>
-            <a:bodyPr lIns="252000" rtlCol="0" anchor="ctr"/>
-            <a:lstStyle/>
-            <a:p>
-              <a:pPr algn="ctr"/>
-              <a:endParaRPr lang="ko-KR" altLang="en-US" sz="1600" dirty="0">
-                <a:solidFill>
-                  <a:srgbClr val="00B050"/>
-                </a:solidFill>
-                <a:latin typeface="Courier New" pitchFamily="49" charset="0"/>
-                <a:ea typeface="맑은 고딕" pitchFamily="50" charset="-127"/>
-                <a:cs typeface="Courier New" pitchFamily="49" charset="0"/>
-              </a:endParaRPr>
-            </a:p>
-          </p:txBody>
-        </p:sp>
-        <p:sp>
-          <p:nvSpPr>
-            <p:cNvPr id="88" name="직사각형 87"/>
-            <p:cNvSpPr/>
-            <p:nvPr/>
-          </p:nvSpPr>
-          <p:spPr>
-            <a:xfrm>
-              <a:off x="7357954" y="4005024"/>
-              <a:ext cx="144000" cy="360000"/>
-            </a:xfrm>
-            <a:prstGeom prst="rect">
-              <a:avLst/>
-            </a:prstGeom>
-            <a:solidFill>
-              <a:schemeClr val="tx1"/>
-            </a:solidFill>
-            <a:ln w="9525">
-              <a:solidFill>
-                <a:schemeClr val="tx1"/>
-              </a:solidFill>
-            </a:ln>
-            <a:effectLst/>
-          </p:spPr>
-          <p:style>
-            <a:lnRef idx="3">
-              <a:schemeClr val="lt1"/>
-            </a:lnRef>
-            <a:fillRef idx="1">
-              <a:schemeClr val="accent1"/>
-            </a:fillRef>
-            <a:effectRef idx="1">
-              <a:schemeClr val="accent1"/>
-            </a:effectRef>
-            <a:fontRef idx="minor">
-              <a:schemeClr val="lt1"/>
-            </a:fontRef>
-          </p:style>
-          <p:txBody>
-            <a:bodyPr lIns="252000" rtlCol="0" anchor="ctr"/>
-            <a:lstStyle/>
-            <a:p>
-              <a:pPr algn="ctr"/>
-              <a:endParaRPr lang="ko-KR" altLang="en-US" sz="1600" dirty="0">
-                <a:solidFill>
-                  <a:srgbClr val="00B050"/>
-                </a:solidFill>
-                <a:latin typeface="Courier New" pitchFamily="49" charset="0"/>
-                <a:ea typeface="맑은 고딕" pitchFamily="50" charset="-127"/>
-                <a:cs typeface="Courier New" pitchFamily="49" charset="0"/>
-              </a:endParaRPr>
-            </a:p>
-          </p:txBody>
-        </p:sp>
-        <p:sp>
-          <p:nvSpPr>
-            <p:cNvPr id="89" name="직사각형 88"/>
-            <p:cNvSpPr/>
-            <p:nvPr/>
-          </p:nvSpPr>
-          <p:spPr>
-            <a:xfrm>
-              <a:off x="7509841" y="3645024"/>
-              <a:ext cx="54000" cy="360000"/>
-            </a:xfrm>
-            <a:prstGeom prst="rect">
-              <a:avLst/>
-            </a:prstGeom>
-            <a:pattFill prst="wdDnDiag">
-              <a:fgClr>
-                <a:schemeClr val="tx1"/>
-              </a:fgClr>
-              <a:bgClr>
-                <a:schemeClr val="bg1"/>
-              </a:bgClr>
-            </a:pattFill>
-            <a:ln w="9525">
-              <a:solidFill>
-                <a:schemeClr val="tx1"/>
-              </a:solidFill>
-            </a:ln>
-            <a:effectLst/>
-          </p:spPr>
-          <p:style>
-            <a:lnRef idx="3">
-              <a:schemeClr val="lt1"/>
-            </a:lnRef>
-            <a:fillRef idx="1">
-              <a:schemeClr val="accent1"/>
-            </a:fillRef>
-            <a:effectRef idx="1">
-              <a:schemeClr val="accent1"/>
-            </a:effectRef>
-            <a:fontRef idx="minor">
-              <a:schemeClr val="lt1"/>
-            </a:fontRef>
-          </p:style>
-          <p:txBody>
-            <a:bodyPr lIns="252000" rtlCol="0" anchor="ctr"/>
-            <a:lstStyle/>
-            <a:p>
-              <a:pPr algn="ctr"/>
-              <a:endParaRPr lang="ko-KR" altLang="en-US" sz="1600" dirty="0">
-                <a:solidFill>
-                  <a:srgbClr val="00B050"/>
-                </a:solidFill>
-                <a:latin typeface="Courier New" pitchFamily="49" charset="0"/>
-                <a:ea typeface="맑은 고딕" pitchFamily="50" charset="-127"/>
-                <a:cs typeface="Courier New" pitchFamily="49" charset="0"/>
-              </a:endParaRPr>
-            </a:p>
-          </p:txBody>
-        </p:sp>
-        <p:sp>
-          <p:nvSpPr>
-            <p:cNvPr id="90" name="직사각형 89"/>
-            <p:cNvSpPr/>
-            <p:nvPr/>
-          </p:nvSpPr>
-          <p:spPr>
-            <a:xfrm>
-              <a:off x="7563841" y="4005024"/>
-              <a:ext cx="144000" cy="360000"/>
-            </a:xfrm>
-            <a:prstGeom prst="rect">
-              <a:avLst/>
-            </a:prstGeom>
-            <a:solidFill>
-              <a:schemeClr val="tx1"/>
-            </a:solidFill>
-            <a:ln w="9525">
-              <a:solidFill>
-                <a:schemeClr val="tx1"/>
-              </a:solidFill>
-            </a:ln>
-            <a:effectLst/>
-          </p:spPr>
-          <p:style>
-            <a:lnRef idx="3">
-              <a:schemeClr val="lt1"/>
-            </a:lnRef>
-            <a:fillRef idx="1">
-              <a:schemeClr val="accent1"/>
-            </a:fillRef>
-            <a:effectRef idx="1">
-              <a:schemeClr val="accent1"/>
-            </a:effectRef>
-            <a:fontRef idx="minor">
-              <a:schemeClr val="lt1"/>
-            </a:fontRef>
-          </p:style>
-          <p:txBody>
-            <a:bodyPr lIns="252000" rtlCol="0" anchor="ctr"/>
-            <a:lstStyle/>
-            <a:p>
-              <a:pPr algn="ctr"/>
-              <a:endParaRPr lang="ko-KR" altLang="en-US" sz="1600" dirty="0">
-                <a:solidFill>
-                  <a:srgbClr val="00B050"/>
-                </a:solidFill>
-                <a:latin typeface="Courier New" pitchFamily="49" charset="0"/>
-                <a:ea typeface="맑은 고딕" pitchFamily="50" charset="-127"/>
-                <a:cs typeface="Courier New" pitchFamily="49" charset="0"/>
-              </a:endParaRPr>
-            </a:p>
-          </p:txBody>
-        </p:sp>
-        <p:sp>
-          <p:nvSpPr>
-            <p:cNvPr id="91" name="직사각형 90"/>
-            <p:cNvSpPr/>
-            <p:nvPr/>
-          </p:nvSpPr>
-          <p:spPr>
-            <a:xfrm>
-              <a:off x="7715728" y="3645024"/>
-              <a:ext cx="54000" cy="360000"/>
-            </a:xfrm>
-            <a:prstGeom prst="rect">
-              <a:avLst/>
-            </a:prstGeom>
-            <a:pattFill prst="wdDnDiag">
-              <a:fgClr>
-                <a:schemeClr val="tx1"/>
-              </a:fgClr>
-              <a:bgClr>
-                <a:schemeClr val="bg1"/>
-              </a:bgClr>
-            </a:pattFill>
-            <a:ln w="9525">
-              <a:solidFill>
-                <a:schemeClr val="tx1"/>
-              </a:solidFill>
-            </a:ln>
-            <a:effectLst/>
-          </p:spPr>
-          <p:style>
-            <a:lnRef idx="3">
-              <a:schemeClr val="lt1"/>
-            </a:lnRef>
-            <a:fillRef idx="1">
-              <a:schemeClr val="accent1"/>
-            </a:fillRef>
-            <a:effectRef idx="1">
-              <a:schemeClr val="accent1"/>
-            </a:effectRef>
-            <a:fontRef idx="minor">
-              <a:schemeClr val="lt1"/>
-            </a:fontRef>
-          </p:style>
-          <p:txBody>
-            <a:bodyPr lIns="252000" rtlCol="0" anchor="ctr"/>
-            <a:lstStyle/>
-            <a:p>
-              <a:pPr algn="ctr"/>
-              <a:endParaRPr lang="ko-KR" altLang="en-US" sz="1600" dirty="0">
-                <a:solidFill>
-                  <a:srgbClr val="00B050"/>
-                </a:solidFill>
-                <a:latin typeface="Courier New" pitchFamily="49" charset="0"/>
-                <a:ea typeface="맑은 고딕" pitchFamily="50" charset="-127"/>
-                <a:cs typeface="Courier New" pitchFamily="49" charset="0"/>
-              </a:endParaRPr>
-            </a:p>
-          </p:txBody>
-        </p:sp>
-        <p:sp>
-          <p:nvSpPr>
-            <p:cNvPr id="92" name="직사각형 91"/>
-            <p:cNvSpPr/>
-            <p:nvPr/>
-          </p:nvSpPr>
-          <p:spPr>
-            <a:xfrm>
-              <a:off x="7779865" y="4005024"/>
-              <a:ext cx="144000" cy="360000"/>
-            </a:xfrm>
-            <a:prstGeom prst="rect">
-              <a:avLst/>
-            </a:prstGeom>
-            <a:solidFill>
-              <a:schemeClr val="tx1"/>
-            </a:solidFill>
-            <a:ln w="9525">
-              <a:solidFill>
-                <a:schemeClr val="tx1"/>
-              </a:solidFill>
-            </a:ln>
-            <a:effectLst/>
-          </p:spPr>
-          <p:style>
-            <a:lnRef idx="3">
-              <a:schemeClr val="lt1"/>
-            </a:lnRef>
-            <a:fillRef idx="1">
-              <a:schemeClr val="accent1"/>
-            </a:fillRef>
-            <a:effectRef idx="1">
-              <a:schemeClr val="accent1"/>
-            </a:effectRef>
-            <a:fontRef idx="minor">
-              <a:schemeClr val="lt1"/>
-            </a:fontRef>
-          </p:style>
-          <p:txBody>
-            <a:bodyPr lIns="252000" rtlCol="0" anchor="ctr"/>
-            <a:lstStyle/>
-            <a:p>
-              <a:pPr algn="ctr"/>
-              <a:endParaRPr lang="ko-KR" altLang="en-US" sz="1600" dirty="0">
-                <a:solidFill>
-                  <a:srgbClr val="00B050"/>
-                </a:solidFill>
-                <a:latin typeface="Courier New" pitchFamily="49" charset="0"/>
-                <a:ea typeface="맑은 고딕" pitchFamily="50" charset="-127"/>
-                <a:cs typeface="Courier New" pitchFamily="49" charset="0"/>
-              </a:endParaRPr>
-            </a:p>
-          </p:txBody>
-        </p:sp>
-        <p:sp>
-          <p:nvSpPr>
-            <p:cNvPr id="93" name="직사각형 92"/>
-            <p:cNvSpPr/>
-            <p:nvPr/>
-          </p:nvSpPr>
-          <p:spPr>
-            <a:xfrm>
-              <a:off x="7931752" y="3645024"/>
-              <a:ext cx="54000" cy="360000"/>
-            </a:xfrm>
-            <a:prstGeom prst="rect">
-              <a:avLst/>
-            </a:prstGeom>
-            <a:pattFill prst="wdDnDiag">
-              <a:fgClr>
-                <a:schemeClr val="tx1"/>
-              </a:fgClr>
-              <a:bgClr>
-                <a:schemeClr val="bg1"/>
-              </a:bgClr>
-            </a:pattFill>
-            <a:ln w="9525">
-              <a:solidFill>
-                <a:schemeClr val="tx1"/>
-              </a:solidFill>
-            </a:ln>
-            <a:effectLst/>
-          </p:spPr>
-          <p:style>
-            <a:lnRef idx="3">
-              <a:schemeClr val="lt1"/>
-            </a:lnRef>
-            <a:fillRef idx="1">
-              <a:schemeClr val="accent1"/>
-            </a:fillRef>
-            <a:effectRef idx="1">
-              <a:schemeClr val="accent1"/>
-            </a:effectRef>
-            <a:fontRef idx="minor">
-              <a:schemeClr val="lt1"/>
-            </a:fontRef>
-          </p:style>
-          <p:txBody>
-            <a:bodyPr lIns="252000" rtlCol="0" anchor="ctr"/>
-            <a:lstStyle/>
-            <a:p>
-              <a:pPr algn="ctr"/>
-              <a:endParaRPr lang="ko-KR" altLang="en-US" sz="1600" dirty="0">
-                <a:solidFill>
-                  <a:srgbClr val="00B050"/>
-                </a:solidFill>
-                <a:latin typeface="Courier New" pitchFamily="49" charset="0"/>
-                <a:ea typeface="맑은 고딕" pitchFamily="50" charset="-127"/>
-                <a:cs typeface="Courier New" pitchFamily="49" charset="0"/>
-              </a:endParaRPr>
-            </a:p>
-          </p:txBody>
-        </p:sp>
-        <p:sp>
-          <p:nvSpPr>
-            <p:cNvPr id="94" name="직사각형 93"/>
-            <p:cNvSpPr/>
-            <p:nvPr/>
-          </p:nvSpPr>
-          <p:spPr>
-            <a:xfrm>
-              <a:off x="7995889" y="4005024"/>
-              <a:ext cx="144000" cy="360000"/>
-            </a:xfrm>
-            <a:prstGeom prst="rect">
-              <a:avLst/>
-            </a:prstGeom>
-            <a:solidFill>
-              <a:schemeClr val="tx1"/>
-            </a:solidFill>
-            <a:ln w="9525">
-              <a:solidFill>
-                <a:schemeClr val="tx1"/>
-              </a:solidFill>
-            </a:ln>
-            <a:effectLst/>
-          </p:spPr>
-          <p:style>
-            <a:lnRef idx="3">
-              <a:schemeClr val="lt1"/>
-            </a:lnRef>
-            <a:fillRef idx="1">
-              <a:schemeClr val="accent1"/>
-            </a:fillRef>
-            <a:effectRef idx="1">
-              <a:schemeClr val="accent1"/>
-            </a:effectRef>
-            <a:fontRef idx="minor">
-              <a:schemeClr val="lt1"/>
-            </a:fontRef>
-          </p:style>
-          <p:txBody>
-            <a:bodyPr lIns="252000" rtlCol="0" anchor="ctr"/>
-            <a:lstStyle/>
-            <a:p>
-              <a:pPr algn="ctr"/>
-              <a:endParaRPr lang="ko-KR" altLang="en-US" sz="1600" dirty="0">
-                <a:solidFill>
-                  <a:srgbClr val="00B050"/>
-                </a:solidFill>
-                <a:latin typeface="Courier New" pitchFamily="49" charset="0"/>
-                <a:ea typeface="맑은 고딕" pitchFamily="50" charset="-127"/>
-                <a:cs typeface="Courier New" pitchFamily="49" charset="0"/>
-              </a:endParaRPr>
-            </a:p>
-          </p:txBody>
-        </p:sp>
-        <p:sp>
-          <p:nvSpPr>
-            <p:cNvPr id="95" name="직사각형 94"/>
-            <p:cNvSpPr/>
-            <p:nvPr/>
-          </p:nvSpPr>
-          <p:spPr>
-            <a:xfrm>
-              <a:off x="8147776" y="3645024"/>
-              <a:ext cx="54000" cy="360000"/>
-            </a:xfrm>
-            <a:prstGeom prst="rect">
-              <a:avLst/>
-            </a:prstGeom>
-            <a:pattFill prst="wdDnDiag">
-              <a:fgClr>
-                <a:schemeClr val="tx1"/>
-              </a:fgClr>
-              <a:bgClr>
-                <a:schemeClr val="bg1"/>
-              </a:bgClr>
-            </a:pattFill>
-            <a:ln w="9525">
-              <a:solidFill>
-                <a:schemeClr val="tx1"/>
-              </a:solidFill>
-            </a:ln>
-            <a:effectLst/>
-          </p:spPr>
-          <p:style>
-            <a:lnRef idx="3">
-              <a:schemeClr val="lt1"/>
-            </a:lnRef>
-            <a:fillRef idx="1">
-              <a:schemeClr val="accent1"/>
-            </a:fillRef>
-            <a:effectRef idx="1">
-              <a:schemeClr val="accent1"/>
-            </a:effectRef>
-            <a:fontRef idx="minor">
-              <a:schemeClr val="lt1"/>
-            </a:fontRef>
-          </p:style>
-          <p:txBody>
-            <a:bodyPr lIns="252000" rtlCol="0" anchor="ctr"/>
-            <a:lstStyle/>
-            <a:p>
-              <a:pPr algn="ctr"/>
-              <a:endParaRPr lang="ko-KR" altLang="en-US" sz="1600" dirty="0">
-                <a:solidFill>
-                  <a:srgbClr val="00B050"/>
-                </a:solidFill>
-                <a:latin typeface="Courier New" pitchFamily="49" charset="0"/>
-                <a:ea typeface="맑은 고딕" pitchFamily="50" charset="-127"/>
-                <a:cs typeface="Courier New" pitchFamily="49" charset="0"/>
-              </a:endParaRPr>
-            </a:p>
-          </p:txBody>
-        </p:sp>
-        <p:sp>
-          <p:nvSpPr>
-            <p:cNvPr id="96" name="직사각형 95"/>
-            <p:cNvSpPr/>
-            <p:nvPr/>
-          </p:nvSpPr>
-          <p:spPr>
-            <a:xfrm>
-              <a:off x="8198167" y="4005024"/>
-              <a:ext cx="144000" cy="360000"/>
-            </a:xfrm>
-            <a:prstGeom prst="rect">
-              <a:avLst/>
-            </a:prstGeom>
-            <a:solidFill>
-              <a:schemeClr val="tx1"/>
-            </a:solidFill>
-            <a:ln w="9525">
-              <a:solidFill>
-                <a:schemeClr val="tx1"/>
-              </a:solidFill>
-            </a:ln>
-            <a:effectLst/>
-          </p:spPr>
-          <p:style>
-            <a:lnRef idx="3">
-              <a:schemeClr val="lt1"/>
-            </a:lnRef>
-            <a:fillRef idx="1">
-              <a:schemeClr val="accent1"/>
-            </a:fillRef>
-            <a:effectRef idx="1">
-              <a:schemeClr val="accent1"/>
-            </a:effectRef>
-            <a:fontRef idx="minor">
-              <a:schemeClr val="lt1"/>
-            </a:fontRef>
-          </p:style>
-          <p:txBody>
-            <a:bodyPr lIns="252000" rtlCol="0" anchor="ctr"/>
-            <a:lstStyle/>
-            <a:p>
-              <a:pPr algn="ctr"/>
-              <a:endParaRPr lang="ko-KR" altLang="en-US" sz="1600" dirty="0">
-                <a:solidFill>
-                  <a:srgbClr val="00B050"/>
-                </a:solidFill>
-                <a:latin typeface="Courier New" pitchFamily="49" charset="0"/>
-                <a:ea typeface="맑은 고딕" pitchFamily="50" charset="-127"/>
-                <a:cs typeface="Courier New" pitchFamily="49" charset="0"/>
-              </a:endParaRPr>
-            </a:p>
-          </p:txBody>
-        </p:sp>
-        <p:sp>
-          <p:nvSpPr>
-            <p:cNvPr id="97" name="직사각형 96"/>
-            <p:cNvSpPr/>
-            <p:nvPr/>
-          </p:nvSpPr>
-          <p:spPr>
-            <a:xfrm>
-              <a:off x="8350054" y="3645024"/>
-              <a:ext cx="54000" cy="360000"/>
-            </a:xfrm>
-            <a:prstGeom prst="rect">
-              <a:avLst/>
-            </a:prstGeom>
-            <a:pattFill prst="wdDnDiag">
-              <a:fgClr>
-                <a:schemeClr val="tx1"/>
-              </a:fgClr>
-              <a:bgClr>
-                <a:schemeClr val="bg1"/>
-              </a:bgClr>
-            </a:pattFill>
-            <a:ln w="9525">
-              <a:solidFill>
-                <a:schemeClr val="tx1"/>
-              </a:solidFill>
-            </a:ln>
-            <a:effectLst/>
-          </p:spPr>
-          <p:style>
-            <a:lnRef idx="3">
-              <a:schemeClr val="lt1"/>
-            </a:lnRef>
-            <a:fillRef idx="1">
-              <a:schemeClr val="accent1"/>
-            </a:fillRef>
-            <a:effectRef idx="1">
-              <a:schemeClr val="accent1"/>
-            </a:effectRef>
-            <a:fontRef idx="minor">
-              <a:schemeClr val="lt1"/>
-            </a:fontRef>
-          </p:style>
-          <p:txBody>
-            <a:bodyPr lIns="252000" rtlCol="0" anchor="ctr"/>
-            <a:lstStyle/>
-            <a:p>
-              <a:pPr algn="ctr"/>
-              <a:endParaRPr lang="ko-KR" altLang="en-US" sz="1600" dirty="0">
-                <a:solidFill>
-                  <a:srgbClr val="00B050"/>
-                </a:solidFill>
-                <a:latin typeface="Courier New" pitchFamily="49" charset="0"/>
-                <a:ea typeface="맑은 고딕" pitchFamily="50" charset="-127"/>
-                <a:cs typeface="Courier New" pitchFamily="49" charset="0"/>
-              </a:endParaRPr>
-            </a:p>
-          </p:txBody>
-        </p:sp>
-        <p:sp>
-          <p:nvSpPr>
-            <p:cNvPr id="98" name="직사각형 97"/>
-            <p:cNvSpPr/>
-            <p:nvPr/>
-          </p:nvSpPr>
-          <p:spPr>
-            <a:xfrm>
-              <a:off x="8414191" y="4005024"/>
-              <a:ext cx="144000" cy="360000"/>
-            </a:xfrm>
-            <a:prstGeom prst="rect">
-              <a:avLst/>
-            </a:prstGeom>
-            <a:solidFill>
-              <a:schemeClr val="tx1"/>
-            </a:solidFill>
-            <a:ln w="9525">
-              <a:solidFill>
-                <a:schemeClr val="tx1"/>
-              </a:solidFill>
-            </a:ln>
-            <a:effectLst/>
-          </p:spPr>
-          <p:style>
-            <a:lnRef idx="3">
-              <a:schemeClr val="lt1"/>
-            </a:lnRef>
-            <a:fillRef idx="1">
-              <a:schemeClr val="accent1"/>
-            </a:fillRef>
-            <a:effectRef idx="1">
-              <a:schemeClr val="accent1"/>
-            </a:effectRef>
-            <a:fontRef idx="minor">
-              <a:schemeClr val="lt1"/>
-            </a:fontRef>
-          </p:style>
-          <p:txBody>
-            <a:bodyPr lIns="252000" rtlCol="0" anchor="ctr"/>
-            <a:lstStyle/>
-            <a:p>
-              <a:pPr algn="ctr"/>
-              <a:endParaRPr lang="ko-KR" altLang="en-US" sz="1600" dirty="0">
-                <a:solidFill>
-                  <a:srgbClr val="00B050"/>
-                </a:solidFill>
-                <a:latin typeface="Courier New" pitchFamily="49" charset="0"/>
-                <a:ea typeface="맑은 고딕" pitchFamily="50" charset="-127"/>
-                <a:cs typeface="Courier New" pitchFamily="49" charset="0"/>
-              </a:endParaRPr>
-            </a:p>
-          </p:txBody>
-        </p:sp>
-        <p:sp>
-          <p:nvSpPr>
-            <p:cNvPr id="99" name="직사각형 98"/>
-            <p:cNvSpPr/>
-            <p:nvPr/>
-          </p:nvSpPr>
-          <p:spPr>
-            <a:xfrm>
-              <a:off x="8566078" y="3645024"/>
-              <a:ext cx="54000" cy="360000"/>
-            </a:xfrm>
-            <a:prstGeom prst="rect">
-              <a:avLst/>
-            </a:prstGeom>
-            <a:pattFill prst="wdDnDiag">
-              <a:fgClr>
-                <a:schemeClr val="tx1"/>
-              </a:fgClr>
-              <a:bgClr>
-                <a:schemeClr val="bg1"/>
-              </a:bgClr>
-            </a:pattFill>
-            <a:ln w="9525">
-              <a:solidFill>
-                <a:schemeClr val="tx1"/>
-              </a:solidFill>
-            </a:ln>
-            <a:effectLst/>
-          </p:spPr>
-          <p:style>
-            <a:lnRef idx="3">
-              <a:schemeClr val="lt1"/>
-            </a:lnRef>
-            <a:fillRef idx="1">
-              <a:schemeClr val="accent1"/>
-            </a:fillRef>
-            <a:effectRef idx="1">
-              <a:schemeClr val="accent1"/>
-            </a:effectRef>
-            <a:fontRef idx="minor">
-              <a:schemeClr val="lt1"/>
-            </a:fontRef>
-          </p:style>
-          <p:txBody>
-            <a:bodyPr lIns="252000" rtlCol="0" anchor="ctr"/>
-            <a:lstStyle/>
-            <a:p>
-              <a:pPr algn="ctr"/>
-              <a:endParaRPr lang="ko-KR" altLang="en-US" sz="1600" dirty="0">
-                <a:solidFill>
-                  <a:srgbClr val="00B050"/>
-                </a:solidFill>
-                <a:latin typeface="Courier New" pitchFamily="49" charset="0"/>
-                <a:ea typeface="맑은 고딕" pitchFamily="50" charset="-127"/>
-                <a:cs typeface="Courier New" pitchFamily="49" charset="0"/>
-              </a:endParaRPr>
-            </a:p>
-          </p:txBody>
-        </p:sp>
-        <p:sp>
-          <p:nvSpPr>
-            <p:cNvPr id="100" name="직사각형 99"/>
-            <p:cNvSpPr/>
-            <p:nvPr/>
-          </p:nvSpPr>
-          <p:spPr>
-            <a:xfrm>
-              <a:off x="8630215" y="4005024"/>
-              <a:ext cx="144000" cy="360000"/>
-            </a:xfrm>
-            <a:prstGeom prst="rect">
-              <a:avLst/>
-            </a:prstGeom>
-            <a:solidFill>
-              <a:schemeClr val="tx1"/>
-            </a:solidFill>
-            <a:ln w="9525">
-              <a:solidFill>
-                <a:schemeClr val="tx1"/>
-              </a:solidFill>
-            </a:ln>
-            <a:effectLst/>
-          </p:spPr>
-          <p:style>
-            <a:lnRef idx="3">
-              <a:schemeClr val="lt1"/>
-            </a:lnRef>
-            <a:fillRef idx="1">
-              <a:schemeClr val="accent1"/>
-            </a:fillRef>
-            <a:effectRef idx="1">
-              <a:schemeClr val="accent1"/>
-            </a:effectRef>
-            <a:fontRef idx="minor">
-              <a:schemeClr val="lt1"/>
-            </a:fontRef>
-          </p:style>
-          <p:txBody>
-            <a:bodyPr lIns="252000" rtlCol="0" anchor="ctr"/>
-            <a:lstStyle/>
-            <a:p>
-              <a:pPr algn="ctr"/>
-              <a:endParaRPr lang="ko-KR" altLang="en-US" sz="1600" dirty="0">
-                <a:solidFill>
-                  <a:srgbClr val="00B050"/>
-                </a:solidFill>
-                <a:latin typeface="Courier New" pitchFamily="49" charset="0"/>
-                <a:ea typeface="맑은 고딕" pitchFamily="50" charset="-127"/>
-                <a:cs typeface="Courier New" pitchFamily="49" charset="0"/>
-              </a:endParaRPr>
-            </a:p>
-          </p:txBody>
-        </p:sp>
-      </p:grpSp>
       <p:sp>
         <p:nvSpPr>
           <p:cNvPr id="101" name="TextBox 100"/>
@@ -35845,6 +30891,78 @@
           </a:p>
         </p:txBody>
       </p:sp>
+      <p:pic>
+        <p:nvPicPr>
+          <p:cNvPr id="103" name="Picture 102" descr="A graph of a number of numbers&#10;&#10;AI-generated content may be incorrect.">
+            <a:extLst>
+              <a:ext uri="{FF2B5EF4-FFF2-40B4-BE49-F238E27FC236}">
+                <a16:creationId xmlns:a16="http://schemas.microsoft.com/office/drawing/2014/main" id="{A7C1967F-E3CE-12CD-67AA-60D1F497C6D3}"/>
+              </a:ext>
+            </a:extLst>
+          </p:cNvPr>
+          <p:cNvPicPr>
+            <a:picLocks noChangeAspect="1"/>
+          </p:cNvPicPr>
+          <p:nvPr/>
+        </p:nvPicPr>
+        <p:blipFill>
+          <a:blip r:embed="rId2">
+            <a:extLst>
+              <a:ext uri="{28A0092B-C50C-407E-A947-70E740481C1C}">
+                <a14:useLocalDpi xmlns:a14="http://schemas.microsoft.com/office/drawing/2010/main" val="0"/>
+              </a:ext>
+            </a:extLst>
+          </a:blip>
+          <a:stretch>
+            <a:fillRect/>
+          </a:stretch>
+        </p:blipFill>
+        <p:spPr>
+          <a:xfrm>
+            <a:off x="1083699" y="3137251"/>
+            <a:ext cx="3200269" cy="3022476"/>
+          </a:xfrm>
+          <a:prstGeom prst="rect">
+            <a:avLst/>
+          </a:prstGeom>
+        </p:spPr>
+      </p:pic>
+      <p:pic>
+        <p:nvPicPr>
+          <p:cNvPr id="105" name="Picture 104" descr="A graph of numbers and a bar chart&#10;&#10;AI-generated content may be incorrect.">
+            <a:extLst>
+              <a:ext uri="{FF2B5EF4-FFF2-40B4-BE49-F238E27FC236}">
+                <a16:creationId xmlns:a16="http://schemas.microsoft.com/office/drawing/2014/main" id="{A3BAEAF8-4452-755F-FBE1-CA3921361102}"/>
+              </a:ext>
+            </a:extLst>
+          </p:cNvPr>
+          <p:cNvPicPr>
+            <a:picLocks noChangeAspect="1"/>
+          </p:cNvPicPr>
+          <p:nvPr/>
+        </p:nvPicPr>
+        <p:blipFill>
+          <a:blip r:embed="rId3">
+            <a:extLst>
+              <a:ext uri="{28A0092B-C50C-407E-A947-70E740481C1C}">
+                <a14:useLocalDpi xmlns:a14="http://schemas.microsoft.com/office/drawing/2010/main" val="0"/>
+              </a:ext>
+            </a:extLst>
+          </a:blip>
+          <a:stretch>
+            <a:fillRect/>
+          </a:stretch>
+        </p:blipFill>
+        <p:spPr>
+          <a:xfrm>
+            <a:off x="4700941" y="3139155"/>
+            <a:ext cx="3327443" cy="3020572"/>
+          </a:xfrm>
+          <a:prstGeom prst="rect">
+            <a:avLst/>
+          </a:prstGeom>
+        </p:spPr>
+      </p:pic>
     </p:spTree>
     <p:extLst>
       <p:ext uri="{BB962C8B-B14F-4D97-AF65-F5344CB8AC3E}">
@@ -35855,142 +30973,6 @@
   <p:clrMapOvr>
     <a:masterClrMapping/>
   </p:clrMapOvr>
-  <p:timing>
-    <p:tnLst>
-      <p:par>
-        <p:cTn id="1" dur="indefinite" restart="never" nodeType="tmRoot">
-          <p:childTnLst>
-            <p:seq concurrent="1" nextAc="seek">
-              <p:cTn id="2" dur="indefinite" nodeType="mainSeq">
-                <p:childTnLst>
-                  <p:par>
-                    <p:cTn id="3" fill="hold">
-                      <p:stCondLst>
-                        <p:cond delay="indefinite"/>
-                      </p:stCondLst>
-                      <p:childTnLst>
-                        <p:par>
-                          <p:cTn id="4" fill="hold">
-                            <p:stCondLst>
-                              <p:cond delay="0"/>
-                            </p:stCondLst>
-                            <p:childTnLst>
-                              <p:par>
-                                <p:cTn id="5" presetID="3" presetClass="entr" presetSubtype="10" fill="hold" nodeType="clickEffect">
-                                  <p:stCondLst>
-                                    <p:cond delay="0"/>
-                                  </p:stCondLst>
-                                  <p:childTnLst>
-                                    <p:set>
-                                      <p:cBhvr>
-                                        <p:cTn id="6" dur="1" fill="hold">
-                                          <p:stCondLst>
-                                            <p:cond delay="0"/>
-                                          </p:stCondLst>
-                                        </p:cTn>
-                                        <p:tgtEl>
-                                          <p:spTgt spid="6"/>
-                                        </p:tgtEl>
-                                        <p:attrNameLst>
-                                          <p:attrName>style.visibility</p:attrName>
-                                        </p:attrNameLst>
-                                      </p:cBhvr>
-                                      <p:to>
-                                        <p:strVal val="visible"/>
-                                      </p:to>
-                                    </p:set>
-                                    <p:animEffect transition="in" filter="blinds(horizontal)">
-                                      <p:cBhvr>
-                                        <p:cTn id="7" dur="500"/>
-                                        <p:tgtEl>
-                                          <p:spTgt spid="6"/>
-                                        </p:tgtEl>
-                                      </p:cBhvr>
-                                    </p:animEffect>
-                                  </p:childTnLst>
-                                </p:cTn>
-                              </p:par>
-                            </p:childTnLst>
-                          </p:cTn>
-                        </p:par>
-                      </p:childTnLst>
-                    </p:cTn>
-                  </p:par>
-                  <p:par>
-                    <p:cTn id="8" fill="hold">
-                      <p:stCondLst>
-                        <p:cond delay="indefinite"/>
-                      </p:stCondLst>
-                      <p:childTnLst>
-                        <p:par>
-                          <p:cTn id="9" fill="hold">
-                            <p:stCondLst>
-                              <p:cond delay="0"/>
-                            </p:stCondLst>
-                            <p:childTnLst>
-                              <p:par>
-                                <p:cTn id="10" presetID="3" presetClass="entr" presetSubtype="10" fill="hold" nodeType="clickEffect">
-                                  <p:stCondLst>
-                                    <p:cond delay="0"/>
-                                  </p:stCondLst>
-                                  <p:childTnLst>
-                                    <p:set>
-                                      <p:cBhvr>
-                                        <p:cTn id="11" dur="1" fill="hold">
-                                          <p:stCondLst>
-                                            <p:cond delay="0"/>
-                                          </p:stCondLst>
-                                        </p:cTn>
-                                        <p:tgtEl>
-                                          <p:spTgt spid="54"/>
-                                        </p:tgtEl>
-                                        <p:attrNameLst>
-                                          <p:attrName>style.visibility</p:attrName>
-                                        </p:attrNameLst>
-                                      </p:cBhvr>
-                                      <p:to>
-                                        <p:strVal val="visible"/>
-                                      </p:to>
-                                    </p:set>
-                                    <p:animEffect transition="in" filter="blinds(horizontal)">
-                                      <p:cBhvr>
-                                        <p:cTn id="12" dur="500"/>
-                                        <p:tgtEl>
-                                          <p:spTgt spid="54"/>
-                                        </p:tgtEl>
-                                      </p:cBhvr>
-                                    </p:animEffect>
-                                  </p:childTnLst>
-                                </p:cTn>
-                              </p:par>
-                            </p:childTnLst>
-                          </p:cTn>
-                        </p:par>
-                      </p:childTnLst>
-                    </p:cTn>
-                  </p:par>
-                </p:childTnLst>
-              </p:cTn>
-              <p:prevCondLst>
-                <p:cond evt="onPrev" delay="0">
-                  <p:tgtEl>
-                    <p:sldTgt/>
-                  </p:tgtEl>
-                </p:cond>
-              </p:prevCondLst>
-              <p:nextCondLst>
-                <p:cond evt="onNext" delay="0">
-                  <p:tgtEl>
-                    <p:sldTgt/>
-                  </p:tgtEl>
-                </p:cond>
-              </p:nextCondLst>
-            </p:seq>
-          </p:childTnLst>
-        </p:cTn>
-      </p:par>
-    </p:tnLst>
-  </p:timing>
 </p:sld>
 </file>
 
@@ -42388,14 +37370,14 @@
           <a:effectLst/>
           <a:extLst>
             <a:ext uri="{909E8E84-426E-40dd-AFC4-6F175D3DCCD1}">
-              <a14:hiddenFill xmlns:a14="http://schemas.microsoft.com/office/drawing/2010/main" xmlns="">
+              <a14:hiddenFill xmlns="" xmlns:a14="http://schemas.microsoft.com/office/drawing/2010/main">
                 <a:solidFill>
                   <a:schemeClr val="accent1"/>
                 </a:solidFill>
               </a14:hiddenFill>
             </a:ext>
             <a:ext uri="{91240B29-F687-4f45-9708-019B960494DF}">
-              <a14:hiddenLine xmlns:a14="http://schemas.microsoft.com/office/drawing/2010/main" xmlns="" w="9525">
+              <a14:hiddenLine xmlns="" xmlns:a14="http://schemas.microsoft.com/office/drawing/2010/main" w="9525">
                 <a:solidFill>
                   <a:schemeClr val="tx1"/>
                 </a:solidFill>
@@ -42405,7 +37387,7 @@
               </a14:hiddenLine>
             </a:ext>
             <a:ext uri="{AF507438-7753-43e0-B8FC-AC1667EBCBE1}">
-              <a14:hiddenEffects xmlns:a14="http://schemas.microsoft.com/office/drawing/2010/main" xmlns="">
+              <a14:hiddenEffects xmlns="" xmlns:a14="http://schemas.microsoft.com/office/drawing/2010/main">
                 <a:effectLst>
                   <a:outerShdw dist="35921" dir="2700000" algn="ctr" rotWithShape="0">
                     <a:schemeClr val="bg2"/>
